--- a/gun/data/Travel_QA_Engine_2026.pptx
+++ b/gun/data/Travel_QA_Engine_2026.pptx
@@ -2641,7 +2641,6 @@
           <a:bodyPr/>
           <a:lstStyle/>
           <a:p>
-            <a:pPr/>
             <a:endParaRPr lang="ko-KR" altLang="en-US">
               <a:latin typeface="Pretendard"/>
               <a:ea typeface="Pretendard"/>
@@ -2959,7 +2958,7 @@
           <a:noFill/>
         </p:spPr>
         <p:txBody>
-          <a:bodyPr wrap="none" lIns="0" rIns="0" tIns="0" bIns="0">
+          <a:bodyPr wrap="none" lIns="0" tIns="0" rIns="0" bIns="0">
             <a:spAutoFit/>
           </a:bodyPr>
           <a:lstStyle/>
@@ -3022,6 +3021,7 @@
           <a:lstStyle/>
           <a:p>
             <a:pPr algn="ctr"/>
+            <a:endParaRPr/>
           </a:p>
         </p:txBody>
       </p:sp>
@@ -3803,6 +3803,7 @@
           <a:lstStyle/>
           <a:p>
             <a:pPr algn="ctr"/>
+            <a:endParaRPr/>
           </a:p>
         </p:txBody>
       </p:sp>
@@ -3849,6 +3850,7 @@
           <a:lstStyle/>
           <a:p>
             <a:pPr algn="ctr"/>
+            <a:endParaRPr/>
           </a:p>
         </p:txBody>
       </p:sp>
@@ -3895,6 +3897,7 @@
           <a:lstStyle/>
           <a:p>
             <a:pPr algn="ctr"/>
+            <a:endParaRPr/>
           </a:p>
         </p:txBody>
       </p:sp>
@@ -3941,6 +3944,7 @@
           <a:lstStyle/>
           <a:p>
             <a:pPr algn="ctr"/>
+            <a:endParaRPr/>
           </a:p>
         </p:txBody>
       </p:sp>
@@ -3987,6 +3991,7 @@
           <a:lstStyle/>
           <a:p>
             <a:pPr algn="ctr"/>
+            <a:endParaRPr/>
           </a:p>
         </p:txBody>
       </p:sp>
@@ -4033,6 +4038,7 @@
           <a:lstStyle/>
           <a:p>
             <a:pPr algn="ctr"/>
+            <a:endParaRPr/>
           </a:p>
         </p:txBody>
       </p:sp>
@@ -4079,6 +4085,7 @@
           <a:lstStyle/>
           <a:p>
             <a:pPr algn="ctr"/>
+            <a:endParaRPr/>
           </a:p>
         </p:txBody>
       </p:sp>
@@ -4123,6 +4130,7 @@
           <a:lstStyle/>
           <a:p>
             <a:pPr algn="ctr"/>
+            <a:endParaRPr/>
           </a:p>
         </p:txBody>
       </p:sp>
@@ -4167,6 +4175,7 @@
           <a:lstStyle/>
           <a:p>
             <a:pPr algn="ctr"/>
+            <a:endParaRPr/>
           </a:p>
         </p:txBody>
       </p:sp>
@@ -4187,7 +4196,7 @@
           <a:noFill/>
         </p:spPr>
         <p:txBody>
-          <a:bodyPr wrap="square" lIns="0" rIns="0" tIns="0" bIns="0" anchor="ctr">
+          <a:bodyPr wrap="square" lIns="0" tIns="0" rIns="0" bIns="0" anchor="ctr">
             <a:spAutoFit/>
           </a:bodyPr>
           <a:lstStyle/>
@@ -4224,7 +4233,7 @@
           <a:noFill/>
         </p:spPr>
         <p:txBody>
-          <a:bodyPr wrap="square" lIns="0" rIns="0" tIns="0" bIns="0" anchor="ctr">
+          <a:bodyPr wrap="square" lIns="0" tIns="0" rIns="0" bIns="0" anchor="ctr">
             <a:spAutoFit/>
           </a:bodyPr>
           <a:lstStyle/>
@@ -4283,7 +4292,7 @@
           </a:fontRef>
         </p:style>
         <p:txBody>
-          <a:bodyPr rtlCol="0" anchor="ctr" lIns="0" rIns="0" tIns="0" bIns="0" wrap="square"/>
+          <a:bodyPr wrap="square" lIns="0" tIns="0" rIns="0" bIns="0" rtlCol="0" anchor="ctr"/>
           <a:lstStyle/>
           <a:p>
             <a:pPr algn="ctr"/>
@@ -4340,7 +4349,7 @@
           </a:fontRef>
         </p:style>
         <p:txBody>
-          <a:bodyPr rtlCol="0" anchor="ctr" lIns="0" rIns="0" tIns="0" bIns="0" wrap="square"/>
+          <a:bodyPr wrap="square" lIns="0" tIns="0" rIns="0" bIns="0" rtlCol="0" anchor="ctr"/>
           <a:lstStyle/>
           <a:p>
             <a:pPr algn="ctr"/>
@@ -4397,7 +4406,7 @@
           </a:fontRef>
         </p:style>
         <p:txBody>
-          <a:bodyPr rtlCol="0" anchor="ctr" lIns="0" rIns="0" tIns="0" bIns="0" wrap="square"/>
+          <a:bodyPr wrap="square" lIns="0" tIns="0" rIns="0" bIns="0" rtlCol="0" anchor="ctr"/>
           <a:lstStyle/>
           <a:p>
             <a:pPr algn="ctr"/>
@@ -4432,7 +4441,7 @@
           <a:noFill/>
         </p:spPr>
         <p:txBody>
-          <a:bodyPr wrap="square" lIns="0" rIns="0" tIns="0" bIns="0" anchor="ctr">
+          <a:bodyPr wrap="square" lIns="0" tIns="0" rIns="0" bIns="0" anchor="ctr">
             <a:spAutoFit/>
           </a:bodyPr>
           <a:lstStyle/>
@@ -4513,7 +4522,6 @@
           <a:bodyPr/>
           <a:lstStyle/>
           <a:p>
-            <a:pPr/>
             <a:endParaRPr lang="ko-KR" altLang="en-US">
               <a:latin typeface="Pretendard"/>
               <a:ea typeface="Pretendard"/>
@@ -4679,7 +4687,6 @@
           <a:bodyPr/>
           <a:lstStyle/>
           <a:p>
-            <a:pPr/>
             <a:endParaRPr lang="ko-KR" altLang="en-US">
               <a:latin typeface="Pretendard"/>
               <a:ea typeface="Pretendard"/>
@@ -4759,7 +4766,6 @@
           <a:bodyPr/>
           <a:lstStyle/>
           <a:p>
-            <a:pPr/>
             <a:endParaRPr lang="ko-KR" altLang="en-US">
               <a:latin typeface="Pretendard"/>
               <a:ea typeface="Pretendard"/>
@@ -4839,7 +4845,6 @@
           <a:bodyPr/>
           <a:lstStyle/>
           <a:p>
-            <a:pPr/>
             <a:endParaRPr lang="ko-KR" altLang="en-US">
               <a:latin typeface="Pretendard"/>
               <a:ea typeface="Pretendard"/>
@@ -4919,7 +4924,6 @@
           <a:bodyPr/>
           <a:lstStyle/>
           <a:p>
-            <a:pPr/>
             <a:endParaRPr lang="ko-KR" altLang="en-US">
               <a:latin typeface="Pretendard"/>
               <a:ea typeface="Pretendard"/>
@@ -4999,7 +5003,6 @@
           <a:bodyPr/>
           <a:lstStyle/>
           <a:p>
-            <a:pPr/>
             <a:endParaRPr lang="ko-KR" altLang="en-US">
               <a:latin typeface="Pretendard"/>
               <a:ea typeface="Pretendard"/>
@@ -5079,7 +5082,6 @@
           <a:bodyPr/>
           <a:lstStyle/>
           <a:p>
-            <a:pPr/>
             <a:endParaRPr lang="ko-KR" altLang="en-US">
               <a:latin typeface="Pretendard"/>
               <a:ea typeface="Pretendard"/>
@@ -5159,7 +5161,6 @@
           <a:bodyPr/>
           <a:lstStyle/>
           <a:p>
-            <a:pPr/>
             <a:endParaRPr lang="ko-KR" altLang="en-US">
               <a:latin typeface="Pretendard"/>
               <a:ea typeface="Pretendard"/>
@@ -5239,7 +5240,6 @@
           <a:bodyPr/>
           <a:lstStyle/>
           <a:p>
-            <a:pPr/>
             <a:endParaRPr lang="ko-KR" altLang="en-US">
               <a:latin typeface="Pretendard"/>
               <a:ea typeface="Pretendard"/>
@@ -5319,7 +5319,6 @@
           <a:bodyPr/>
           <a:lstStyle/>
           <a:p>
-            <a:pPr/>
             <a:endParaRPr lang="ko-KR" altLang="en-US">
               <a:latin typeface="Pretendard"/>
               <a:ea typeface="Pretendard"/>
@@ -5399,7 +5398,6 @@
           <a:bodyPr/>
           <a:lstStyle/>
           <a:p>
-            <a:pPr/>
             <a:endParaRPr lang="ko-KR" altLang="en-US">
               <a:latin typeface="Pretendard"/>
               <a:ea typeface="Pretendard"/>
@@ -5479,7 +5477,6 @@
           <a:bodyPr/>
           <a:lstStyle/>
           <a:p>
-            <a:pPr/>
             <a:endParaRPr lang="ko-KR" altLang="en-US">
               <a:latin typeface="Pretendard"/>
               <a:ea typeface="Pretendard"/>
@@ -5559,7 +5556,6 @@
           <a:bodyPr/>
           <a:lstStyle/>
           <a:p>
-            <a:pPr/>
             <a:endParaRPr lang="ko-KR" altLang="en-US">
               <a:latin typeface="Pretendard"/>
               <a:ea typeface="Pretendard"/>
@@ -5639,7 +5635,6 @@
           <a:bodyPr/>
           <a:lstStyle/>
           <a:p>
-            <a:pPr/>
             <a:endParaRPr lang="ko-KR" altLang="en-US">
               <a:latin typeface="Pretendard"/>
               <a:ea typeface="Pretendard"/>
@@ -5719,7 +5714,6 @@
           <a:bodyPr/>
           <a:lstStyle/>
           <a:p>
-            <a:pPr/>
             <a:endParaRPr lang="ko-KR" altLang="en-US">
               <a:latin typeface="Pretendard"/>
               <a:ea typeface="Pretendard"/>
@@ -5799,7 +5793,6 @@
           <a:bodyPr/>
           <a:lstStyle/>
           <a:p>
-            <a:pPr/>
             <a:endParaRPr lang="ko-KR" altLang="en-US">
               <a:latin typeface="Pretendard"/>
               <a:ea typeface="Pretendard"/>
@@ -5879,7 +5872,6 @@
           <a:bodyPr/>
           <a:lstStyle/>
           <a:p>
-            <a:pPr/>
             <a:endParaRPr lang="ko-KR" altLang="en-US">
               <a:latin typeface="Pretendard"/>
               <a:ea typeface="Pretendard"/>
@@ -5959,7 +5951,6 @@
           <a:bodyPr/>
           <a:lstStyle/>
           <a:p>
-            <a:pPr/>
             <a:endParaRPr lang="ko-KR" altLang="en-US">
               <a:latin typeface="Pretendard"/>
               <a:ea typeface="Pretendard"/>
@@ -6039,7 +6030,6 @@
           <a:bodyPr/>
           <a:lstStyle/>
           <a:p>
-            <a:pPr/>
             <a:endParaRPr lang="ko-KR" altLang="en-US">
               <a:latin typeface="Pretendard"/>
               <a:ea typeface="Pretendard"/>
@@ -6119,7 +6109,6 @@
           <a:bodyPr/>
           <a:lstStyle/>
           <a:p>
-            <a:pPr/>
             <a:endParaRPr lang="ko-KR" altLang="en-US">
               <a:latin typeface="Pretendard"/>
               <a:ea typeface="Pretendard"/>
@@ -6199,7 +6188,6 @@
           <a:bodyPr/>
           <a:lstStyle/>
           <a:p>
-            <a:pPr/>
             <a:endParaRPr lang="ko-KR" altLang="en-US">
               <a:latin typeface="Pretendard"/>
               <a:ea typeface="Pretendard"/>
@@ -6279,7 +6267,6 @@
           <a:bodyPr/>
           <a:lstStyle/>
           <a:p>
-            <a:pPr/>
             <a:endParaRPr lang="ko-KR" altLang="en-US">
               <a:latin typeface="Pretendard"/>
               <a:ea typeface="Pretendard"/>
@@ -6359,7 +6346,6 @@
           <a:bodyPr/>
           <a:lstStyle/>
           <a:p>
-            <a:pPr/>
             <a:endParaRPr lang="ko-KR" altLang="en-US">
               <a:latin typeface="Pretendard"/>
               <a:ea typeface="Pretendard"/>
@@ -6439,7 +6425,6 @@
           <a:bodyPr/>
           <a:lstStyle/>
           <a:p>
-            <a:pPr/>
             <a:endParaRPr lang="ko-KR" altLang="en-US">
               <a:latin typeface="Pretendard"/>
               <a:ea typeface="Pretendard"/>
@@ -6519,7 +6504,6 @@
           <a:bodyPr/>
           <a:lstStyle/>
           <a:p>
-            <a:pPr/>
             <a:endParaRPr lang="ko-KR" altLang="en-US">
               <a:latin typeface="Pretendard"/>
               <a:ea typeface="Pretendard"/>
@@ -6599,7 +6583,6 @@
           <a:bodyPr/>
           <a:lstStyle/>
           <a:p>
-            <a:pPr/>
             <a:endParaRPr lang="ko-KR" altLang="en-US">
               <a:latin typeface="Pretendard"/>
               <a:ea typeface="Pretendard"/>
@@ -6679,7 +6662,6 @@
           <a:bodyPr/>
           <a:lstStyle/>
           <a:p>
-            <a:pPr/>
             <a:endParaRPr lang="ko-KR" altLang="en-US">
               <a:latin typeface="Pretendard"/>
               <a:ea typeface="Pretendard"/>
@@ -6759,7 +6741,6 @@
           <a:bodyPr/>
           <a:lstStyle/>
           <a:p>
-            <a:pPr/>
             <a:endParaRPr lang="ko-KR" altLang="en-US">
               <a:latin typeface="Pretendard"/>
               <a:ea typeface="Pretendard"/>
@@ -6839,7 +6820,6 @@
           <a:bodyPr/>
           <a:lstStyle/>
           <a:p>
-            <a:pPr/>
             <a:endParaRPr lang="ko-KR" altLang="en-US">
               <a:latin typeface="Pretendard"/>
               <a:ea typeface="Pretendard"/>
@@ -6919,7 +6899,6 @@
           <a:bodyPr/>
           <a:lstStyle/>
           <a:p>
-            <a:pPr/>
             <a:endParaRPr lang="ko-KR" altLang="en-US">
               <a:latin typeface="Pretendard"/>
               <a:ea typeface="Pretendard"/>
@@ -6999,7 +6978,6 @@
           <a:bodyPr/>
           <a:lstStyle/>
           <a:p>
-            <a:pPr/>
             <a:endParaRPr lang="ko-KR" altLang="en-US">
               <a:latin typeface="Pretendard"/>
               <a:ea typeface="Pretendard"/>
@@ -7079,7 +7057,6 @@
           <a:bodyPr/>
           <a:lstStyle/>
           <a:p>
-            <a:pPr/>
             <a:endParaRPr lang="ko-KR" altLang="en-US">
               <a:latin typeface="Pretendard"/>
               <a:ea typeface="Pretendard"/>
@@ -7159,7 +7136,6 @@
           <a:bodyPr/>
           <a:lstStyle/>
           <a:p>
-            <a:pPr/>
             <a:endParaRPr lang="ko-KR" altLang="en-US">
               <a:latin typeface="Pretendard"/>
               <a:ea typeface="Pretendard"/>
@@ -7239,7 +7215,6 @@
           <a:bodyPr/>
           <a:lstStyle/>
           <a:p>
-            <a:pPr/>
             <a:endParaRPr lang="ko-KR" altLang="en-US">
               <a:latin typeface="Pretendard"/>
               <a:ea typeface="Pretendard"/>
@@ -7319,7 +7294,6 @@
           <a:bodyPr/>
           <a:lstStyle/>
           <a:p>
-            <a:pPr/>
             <a:endParaRPr lang="ko-KR" altLang="en-US">
               <a:latin typeface="Pretendard"/>
               <a:ea typeface="Pretendard"/>
@@ -7399,7 +7373,6 @@
           <a:bodyPr/>
           <a:lstStyle/>
           <a:p>
-            <a:pPr/>
             <a:endParaRPr lang="ko-KR" altLang="en-US">
               <a:latin typeface="Pretendard"/>
               <a:ea typeface="Pretendard"/>
@@ -7479,7 +7452,6 @@
           <a:bodyPr/>
           <a:lstStyle/>
           <a:p>
-            <a:pPr/>
             <a:endParaRPr lang="ko-KR" altLang="en-US">
               <a:latin typeface="Pretendard"/>
               <a:ea typeface="Pretendard"/>
@@ -7559,7 +7531,6 @@
           <a:bodyPr/>
           <a:lstStyle/>
           <a:p>
-            <a:pPr/>
             <a:endParaRPr lang="ko-KR" altLang="en-US">
               <a:latin typeface="Pretendard"/>
               <a:ea typeface="Pretendard"/>
@@ -7639,7 +7610,6 @@
           <a:bodyPr/>
           <a:lstStyle/>
           <a:p>
-            <a:pPr/>
             <a:endParaRPr lang="ko-KR" altLang="en-US">
               <a:latin typeface="Pretendard"/>
               <a:ea typeface="Pretendard"/>
@@ -7719,7 +7689,6 @@
           <a:bodyPr/>
           <a:lstStyle/>
           <a:p>
-            <a:pPr/>
             <a:endParaRPr lang="ko-KR" altLang="en-US">
               <a:latin typeface="Pretendard"/>
               <a:ea typeface="Pretendard"/>
@@ -7799,7 +7768,6 @@
           <a:bodyPr/>
           <a:lstStyle/>
           <a:p>
-            <a:pPr/>
             <a:endParaRPr lang="ko-KR" altLang="en-US">
               <a:latin typeface="Pretendard"/>
               <a:ea typeface="Pretendard"/>
@@ -7879,7 +7847,6 @@
           <a:bodyPr/>
           <a:lstStyle/>
           <a:p>
-            <a:pPr/>
             <a:endParaRPr lang="ko-KR" altLang="en-US">
               <a:latin typeface="Pretendard"/>
               <a:ea typeface="Pretendard"/>
@@ -7959,7 +7926,6 @@
           <a:bodyPr/>
           <a:lstStyle/>
           <a:p>
-            <a:pPr/>
             <a:endParaRPr lang="ko-KR" altLang="en-US">
               <a:latin typeface="Pretendard"/>
               <a:ea typeface="Pretendard"/>
@@ -8039,7 +8005,6 @@
           <a:bodyPr/>
           <a:lstStyle/>
           <a:p>
-            <a:pPr/>
             <a:endParaRPr lang="ko-KR" altLang="en-US">
               <a:latin typeface="Pretendard"/>
               <a:ea typeface="Pretendard"/>
@@ -8119,7 +8084,6 @@
           <a:bodyPr/>
           <a:lstStyle/>
           <a:p>
-            <a:pPr/>
             <a:endParaRPr lang="ko-KR" altLang="en-US">
               <a:latin typeface="Pretendard"/>
               <a:ea typeface="Pretendard"/>
@@ -8199,7 +8163,6 @@
           <a:bodyPr/>
           <a:lstStyle/>
           <a:p>
-            <a:pPr/>
             <a:endParaRPr lang="ko-KR" altLang="en-US">
               <a:latin typeface="Pretendard"/>
               <a:ea typeface="Pretendard"/>
@@ -8279,7 +8242,6 @@
           <a:bodyPr/>
           <a:lstStyle/>
           <a:p>
-            <a:pPr/>
             <a:endParaRPr lang="ko-KR" altLang="en-US">
               <a:latin typeface="Pretendard"/>
               <a:ea typeface="Pretendard"/>
@@ -8359,7 +8321,6 @@
           <a:bodyPr/>
           <a:lstStyle/>
           <a:p>
-            <a:pPr/>
             <a:endParaRPr lang="ko-KR" altLang="en-US">
               <a:latin typeface="Pretendard"/>
               <a:ea typeface="Pretendard"/>
@@ -8439,7 +8400,6 @@
           <a:bodyPr/>
           <a:lstStyle/>
           <a:p>
-            <a:pPr/>
             <a:endParaRPr lang="ko-KR" altLang="en-US">
               <a:latin typeface="Pretendard"/>
               <a:ea typeface="Pretendard"/>
@@ -8519,7 +8479,6 @@
           <a:bodyPr/>
           <a:lstStyle/>
           <a:p>
-            <a:pPr/>
             <a:endParaRPr lang="ko-KR" altLang="en-US">
               <a:latin typeface="Pretendard"/>
               <a:ea typeface="Pretendard"/>
@@ -8599,7 +8558,6 @@
           <a:bodyPr/>
           <a:lstStyle/>
           <a:p>
-            <a:pPr/>
             <a:endParaRPr lang="ko-KR" altLang="en-US">
               <a:latin typeface="Pretendard"/>
               <a:ea typeface="Pretendard"/>
@@ -8679,7 +8637,6 @@
           <a:bodyPr/>
           <a:lstStyle/>
           <a:p>
-            <a:pPr/>
             <a:endParaRPr lang="ko-KR" altLang="en-US">
               <a:latin typeface="Pretendard"/>
               <a:ea typeface="Pretendard"/>
@@ -8759,7 +8716,6 @@
           <a:bodyPr/>
           <a:lstStyle/>
           <a:p>
-            <a:pPr/>
             <a:endParaRPr lang="ko-KR" altLang="en-US">
               <a:latin typeface="Pretendard"/>
               <a:ea typeface="Pretendard"/>
@@ -8839,7 +8795,6 @@
           <a:bodyPr/>
           <a:lstStyle/>
           <a:p>
-            <a:pPr/>
             <a:endParaRPr lang="ko-KR" altLang="en-US">
               <a:latin typeface="Pretendard"/>
               <a:ea typeface="Pretendard"/>
@@ -8919,7 +8874,6 @@
           <a:bodyPr/>
           <a:lstStyle/>
           <a:p>
-            <a:pPr/>
             <a:endParaRPr lang="ko-KR" altLang="en-US">
               <a:latin typeface="Pretendard"/>
               <a:ea typeface="Pretendard"/>
@@ -9161,7 +9115,7 @@
           <a:noFill/>
         </p:spPr>
         <p:txBody>
-          <a:bodyPr wrap="none" lIns="0" rIns="0" tIns="0" bIns="0">
+          <a:bodyPr wrap="none" lIns="0" tIns="0" rIns="0" bIns="0">
             <a:spAutoFit/>
           </a:bodyPr>
           <a:lstStyle/>
@@ -9242,7 +9196,6 @@
           <a:bodyPr/>
           <a:lstStyle/>
           <a:p>
-            <a:pPr/>
             <a:endParaRPr lang="ko-KR" altLang="en-US">
               <a:latin typeface="Pretendard"/>
               <a:ea typeface="Pretendard"/>
@@ -9408,7 +9361,6 @@
           <a:bodyPr/>
           <a:lstStyle/>
           <a:p>
-            <a:pPr/>
             <a:endParaRPr lang="ko-KR" altLang="en-US">
               <a:latin typeface="Pretendard"/>
               <a:ea typeface="Pretendard"/>
@@ -9445,7 +9397,6 @@
           <a:bodyPr/>
           <a:lstStyle/>
           <a:p>
-            <a:pPr/>
             <a:endParaRPr lang="ko-KR" altLang="en-US">
               <a:latin typeface="Pretendard"/>
               <a:ea typeface="Pretendard"/>
@@ -9651,7 +9602,6 @@
           <a:bodyPr/>
           <a:lstStyle/>
           <a:p>
-            <a:pPr/>
             <a:endParaRPr lang="ko-KR" altLang="en-US">
               <a:latin typeface="Pretendard"/>
               <a:ea typeface="Pretendard"/>
@@ -9688,7 +9638,6 @@
           <a:bodyPr/>
           <a:lstStyle/>
           <a:p>
-            <a:pPr/>
             <a:endParaRPr lang="ko-KR" altLang="en-US">
               <a:latin typeface="Pretendard"/>
               <a:ea typeface="Pretendard"/>
@@ -9768,7 +9717,6 @@
           <a:bodyPr/>
           <a:lstStyle/>
           <a:p>
-            <a:pPr/>
             <a:endParaRPr lang="ko-KR" altLang="en-US">
               <a:latin typeface="Pretendard"/>
               <a:ea typeface="Pretendard"/>
@@ -10148,7 +10096,7 @@
           <a:noFill/>
         </p:spPr>
         <p:txBody>
-          <a:bodyPr wrap="none" lIns="0" rIns="0" tIns="0" bIns="0">
+          <a:bodyPr wrap="none" lIns="0" tIns="0" rIns="0" bIns="0">
             <a:spAutoFit/>
           </a:bodyPr>
           <a:lstStyle/>
@@ -10211,6 +10159,7 @@
           <a:lstStyle/>
           <a:p>
             <a:pPr algn="ctr"/>
+            <a:endParaRPr/>
           </a:p>
         </p:txBody>
       </p:sp>
@@ -10231,7 +10180,7 @@
           <a:noFill/>
         </p:spPr>
         <p:txBody>
-          <a:bodyPr wrap="square" lIns="0" rIns="0" tIns="0" bIns="0" anchor="ctr">
+          <a:bodyPr wrap="square" lIns="0" tIns="0" rIns="0" bIns="0" anchor="ctr">
             <a:spAutoFit/>
           </a:bodyPr>
           <a:lstStyle/>
@@ -10329,6 +10278,7 @@
           <a:lstStyle/>
           <a:p>
             <a:pPr algn="ctr"/>
+            <a:endParaRPr/>
           </a:p>
         </p:txBody>
       </p:sp>
@@ -10375,6 +10325,7 @@
           <a:lstStyle/>
           <a:p>
             <a:pPr algn="ctr"/>
+            <a:endParaRPr/>
           </a:p>
         </p:txBody>
       </p:sp>
@@ -10395,7 +10346,7 @@
           <a:noFill/>
         </p:spPr>
         <p:txBody>
-          <a:bodyPr wrap="square" lIns="0" rIns="0" tIns="0" bIns="0" anchor="ctr">
+          <a:bodyPr wrap="square" lIns="0" tIns="0" rIns="0" bIns="0" anchor="ctr">
             <a:spAutoFit/>
           </a:bodyPr>
           <a:lstStyle/>
@@ -10432,7 +10383,7 @@
           <a:noFill/>
         </p:spPr>
         <p:txBody>
-          <a:bodyPr wrap="square" lIns="0" rIns="0" tIns="0" bIns="0" anchor="ctr">
+          <a:bodyPr wrap="square" lIns="0" tIns="0" rIns="0" bIns="0" anchor="ctr">
             <a:spAutoFit/>
           </a:bodyPr>
           <a:lstStyle/>
@@ -10495,6 +10446,7 @@
           <a:lstStyle/>
           <a:p>
             <a:pPr algn="ctr"/>
+            <a:endParaRPr/>
           </a:p>
         </p:txBody>
       </p:sp>
@@ -10515,7 +10467,7 @@
           <a:noFill/>
         </p:spPr>
         <p:txBody>
-          <a:bodyPr wrap="square" lIns="0" rIns="0" tIns="0" bIns="0" anchor="ctr">
+          <a:bodyPr wrap="square" lIns="0" tIns="0" rIns="0" bIns="0" anchor="ctr">
             <a:spAutoFit/>
           </a:bodyPr>
           <a:lstStyle/>
@@ -10649,6 +10601,7 @@
           <a:lstStyle/>
           <a:p>
             <a:pPr algn="ctr"/>
+            <a:endParaRPr/>
           </a:p>
         </p:txBody>
       </p:sp>
@@ -10695,6 +10648,7 @@
           <a:lstStyle/>
           <a:p>
             <a:pPr algn="ctr"/>
+            <a:endParaRPr/>
           </a:p>
         </p:txBody>
       </p:sp>
@@ -10715,7 +10669,7 @@
           <a:noFill/>
         </p:spPr>
         <p:txBody>
-          <a:bodyPr wrap="square" lIns="0" rIns="0" tIns="0" bIns="0" anchor="ctr">
+          <a:bodyPr wrap="square" lIns="0" tIns="0" rIns="0" bIns="0" anchor="ctr">
             <a:spAutoFit/>
           </a:bodyPr>
           <a:lstStyle/>
@@ -10752,7 +10706,7 @@
           <a:noFill/>
         </p:spPr>
         <p:txBody>
-          <a:bodyPr wrap="square" lIns="0" rIns="0" tIns="0" bIns="0" anchor="ctr">
+          <a:bodyPr wrap="square" lIns="0" tIns="0" rIns="0" bIns="0" anchor="ctr">
             <a:spAutoFit/>
           </a:bodyPr>
           <a:lstStyle/>
@@ -10789,7 +10743,7 @@
           <a:noFill/>
         </p:spPr>
         <p:txBody>
-          <a:bodyPr wrap="square" lIns="0" rIns="0" tIns="0" bIns="0" anchor="ctr">
+          <a:bodyPr wrap="square" lIns="0" tIns="0" rIns="0" bIns="0" anchor="ctr">
             <a:spAutoFit/>
           </a:bodyPr>
           <a:lstStyle/>
@@ -10852,6 +10806,7 @@
           <a:lstStyle/>
           <a:p>
             <a:pPr algn="ctr"/>
+            <a:endParaRPr/>
           </a:p>
         </p:txBody>
       </p:sp>
@@ -10896,6 +10851,7 @@
           <a:lstStyle/>
           <a:p>
             <a:pPr algn="ctr"/>
+            <a:endParaRPr/>
           </a:p>
         </p:txBody>
       </p:sp>
@@ -10940,6 +10896,7 @@
           <a:lstStyle/>
           <a:p>
             <a:pPr algn="ctr"/>
+            <a:endParaRPr/>
           </a:p>
         </p:txBody>
       </p:sp>
@@ -10986,6 +10943,7 @@
           <a:lstStyle/>
           <a:p>
             <a:pPr algn="ctr"/>
+            <a:endParaRPr/>
           </a:p>
         </p:txBody>
       </p:sp>
@@ -11006,7 +10964,7 @@
           <a:noFill/>
         </p:spPr>
         <p:txBody>
-          <a:bodyPr wrap="square" lIns="0" rIns="0" tIns="0" bIns="0" anchor="ctr">
+          <a:bodyPr wrap="square" lIns="0" tIns="0" rIns="0" bIns="0" anchor="ctr">
             <a:spAutoFit/>
           </a:bodyPr>
           <a:lstStyle/>
@@ -11069,6 +11027,7 @@
           <a:lstStyle/>
           <a:p>
             <a:pPr algn="ctr"/>
+            <a:endParaRPr/>
           </a:p>
         </p:txBody>
       </p:sp>
@@ -11089,7 +11048,7 @@
           <a:noFill/>
         </p:spPr>
         <p:txBody>
-          <a:bodyPr wrap="square" lIns="0" rIns="0" tIns="0" bIns="0" anchor="ctr">
+          <a:bodyPr wrap="square" lIns="0" tIns="0" rIns="0" bIns="0" anchor="ctr">
             <a:spAutoFit/>
           </a:bodyPr>
           <a:lstStyle/>
@@ -11152,6 +11111,7 @@
           <a:lstStyle/>
           <a:p>
             <a:pPr algn="ctr"/>
+            <a:endParaRPr/>
           </a:p>
         </p:txBody>
       </p:sp>
@@ -11172,7 +11132,7 @@
           <a:noFill/>
         </p:spPr>
         <p:txBody>
-          <a:bodyPr wrap="square" lIns="0" rIns="0" tIns="0" bIns="0" anchor="ctr">
+          <a:bodyPr wrap="square" lIns="0" tIns="0" rIns="0" bIns="0" anchor="ctr">
             <a:spAutoFit/>
           </a:bodyPr>
           <a:lstStyle/>
@@ -11235,6 +11195,7 @@
           <a:lstStyle/>
           <a:p>
             <a:pPr algn="ctr"/>
+            <a:endParaRPr/>
           </a:p>
         </p:txBody>
       </p:sp>
@@ -11255,7 +11216,7 @@
           <a:noFill/>
         </p:spPr>
         <p:txBody>
-          <a:bodyPr wrap="square" lIns="0" rIns="0" tIns="0" bIns="0" anchor="ctr">
+          <a:bodyPr wrap="square" lIns="0" tIns="0" rIns="0" bIns="0" anchor="ctr">
             <a:spAutoFit/>
           </a:bodyPr>
           <a:lstStyle/>
@@ -11318,6 +11279,7 @@
           <a:lstStyle/>
           <a:p>
             <a:pPr algn="ctr"/>
+            <a:endParaRPr/>
           </a:p>
         </p:txBody>
       </p:sp>
@@ -11338,7 +11300,7 @@
           <a:noFill/>
         </p:spPr>
         <p:txBody>
-          <a:bodyPr wrap="square" lIns="0" rIns="0" tIns="0" bIns="0" anchor="ctr">
+          <a:bodyPr wrap="square" lIns="0" tIns="0" rIns="0" bIns="0" anchor="ctr">
             <a:spAutoFit/>
           </a:bodyPr>
           <a:lstStyle/>
@@ -11555,7 +11517,7 @@
           <a:noFill/>
         </p:spPr>
         <p:txBody>
-          <a:bodyPr wrap="square" lIns="0" rIns="0" tIns="0" bIns="0" anchor="ctr">
+          <a:bodyPr wrap="square" lIns="0" tIns="0" rIns="0" bIns="0" anchor="ctr">
             <a:spAutoFit/>
           </a:bodyPr>
           <a:lstStyle/>
@@ -11636,7 +11598,6 @@
           <a:bodyPr/>
           <a:lstStyle/>
           <a:p>
-            <a:pPr/>
             <a:endParaRPr lang="ko-KR" altLang="en-US">
               <a:latin typeface="Pretendard"/>
               <a:ea typeface="Pretendard"/>
@@ -11802,7 +11763,6 @@
           <a:bodyPr/>
           <a:lstStyle/>
           <a:p>
-            <a:pPr/>
             <a:endParaRPr lang="ko-KR" altLang="en-US">
               <a:latin typeface="Pretendard"/>
               <a:ea typeface="Pretendard"/>
@@ -11839,7 +11799,6 @@
           <a:bodyPr/>
           <a:lstStyle/>
           <a:p>
-            <a:pPr/>
             <a:endParaRPr lang="ko-KR" altLang="en-US">
               <a:latin typeface="Pretendard"/>
               <a:ea typeface="Pretendard"/>
@@ -11919,7 +11878,6 @@
           <a:bodyPr/>
           <a:lstStyle/>
           <a:p>
-            <a:pPr/>
             <a:endParaRPr lang="ko-KR" altLang="en-US">
               <a:latin typeface="Pretendard"/>
               <a:ea typeface="Pretendard"/>
@@ -11956,7 +11914,6 @@
           <a:bodyPr/>
           <a:lstStyle/>
           <a:p>
-            <a:pPr/>
             <a:endParaRPr lang="ko-KR" altLang="en-US">
               <a:latin typeface="Pretendard"/>
               <a:ea typeface="Pretendard"/>
@@ -12111,7 +12068,7 @@
           <a:noFill/>
         </p:spPr>
         <p:txBody>
-          <a:bodyPr wrap="none" lIns="0" rIns="0" tIns="0" bIns="0">
+          <a:bodyPr wrap="none" lIns="0" tIns="0" rIns="0" bIns="0">
             <a:spAutoFit/>
           </a:bodyPr>
           <a:lstStyle/>
@@ -12174,6 +12131,7 @@
           <a:lstStyle/>
           <a:p>
             <a:pPr algn="ctr"/>
+            <a:endParaRPr/>
           </a:p>
         </p:txBody>
       </p:sp>
@@ -12194,7 +12152,7 @@
           <a:noFill/>
         </p:spPr>
         <p:txBody>
-          <a:bodyPr wrap="square" lIns="0" rIns="0" tIns="0" bIns="0" anchor="ctr">
+          <a:bodyPr wrap="square" lIns="0" tIns="0" rIns="0" bIns="0" anchor="ctr">
             <a:spAutoFit/>
           </a:bodyPr>
           <a:lstStyle/>
@@ -12259,6 +12217,7 @@
           <a:lstStyle/>
           <a:p>
             <a:pPr algn="ctr"/>
+            <a:endParaRPr/>
           </a:p>
         </p:txBody>
       </p:sp>
@@ -12340,6 +12299,7 @@
           <a:lstStyle/>
           <a:p>
             <a:pPr algn="ctr"/>
+            <a:endParaRPr/>
           </a:p>
         </p:txBody>
       </p:sp>
@@ -12386,6 +12346,7 @@
           <a:lstStyle/>
           <a:p>
             <a:pPr algn="ctr"/>
+            <a:endParaRPr/>
           </a:p>
         </p:txBody>
       </p:sp>
@@ -12432,6 +12393,7 @@
           <a:lstStyle/>
           <a:p>
             <a:pPr algn="ctr"/>
+            <a:endParaRPr/>
           </a:p>
         </p:txBody>
       </p:sp>
@@ -12478,6 +12440,7 @@
           <a:lstStyle/>
           <a:p>
             <a:pPr algn="ctr"/>
+            <a:endParaRPr/>
           </a:p>
         </p:txBody>
       </p:sp>
@@ -12524,6 +12487,7 @@
           <a:lstStyle/>
           <a:p>
             <a:pPr algn="ctr"/>
+            <a:endParaRPr/>
           </a:p>
         </p:txBody>
       </p:sp>
@@ -12570,6 +12534,7 @@
           <a:lstStyle/>
           <a:p>
             <a:pPr algn="ctr"/>
+            <a:endParaRPr/>
           </a:p>
         </p:txBody>
       </p:sp>
@@ -12616,6 +12581,7 @@
           <a:lstStyle/>
           <a:p>
             <a:pPr algn="ctr"/>
+            <a:endParaRPr/>
           </a:p>
         </p:txBody>
       </p:sp>
@@ -12662,6 +12628,7 @@
           <a:lstStyle/>
           <a:p>
             <a:pPr algn="ctr"/>
+            <a:endParaRPr/>
           </a:p>
         </p:txBody>
       </p:sp>
@@ -12708,6 +12675,7 @@
           <a:lstStyle/>
           <a:p>
             <a:pPr algn="ctr"/>
+            <a:endParaRPr/>
           </a:p>
         </p:txBody>
       </p:sp>
@@ -12754,6 +12722,7 @@
           <a:lstStyle/>
           <a:p>
             <a:pPr algn="ctr"/>
+            <a:endParaRPr/>
           </a:p>
         </p:txBody>
       </p:sp>
@@ -12800,6 +12769,7 @@
           <a:lstStyle/>
           <a:p>
             <a:pPr algn="ctr"/>
+            <a:endParaRPr/>
           </a:p>
         </p:txBody>
       </p:sp>
@@ -12846,6 +12816,7 @@
           <a:lstStyle/>
           <a:p>
             <a:pPr algn="ctr"/>
+            <a:endParaRPr/>
           </a:p>
         </p:txBody>
       </p:sp>
@@ -12892,6 +12863,7 @@
           <a:lstStyle/>
           <a:p>
             <a:pPr algn="ctr"/>
+            <a:endParaRPr/>
           </a:p>
         </p:txBody>
       </p:sp>
@@ -12938,6 +12910,7 @@
           <a:lstStyle/>
           <a:p>
             <a:pPr algn="ctr"/>
+            <a:endParaRPr/>
           </a:p>
         </p:txBody>
       </p:sp>
@@ -12984,6 +12957,7 @@
           <a:lstStyle/>
           <a:p>
             <a:pPr algn="ctr"/>
+            <a:endParaRPr/>
           </a:p>
         </p:txBody>
       </p:sp>
@@ -13030,6 +13004,7 @@
           <a:lstStyle/>
           <a:p>
             <a:pPr algn="ctr"/>
+            <a:endParaRPr/>
           </a:p>
         </p:txBody>
       </p:sp>
@@ -13076,6 +13051,7 @@
           <a:lstStyle/>
           <a:p>
             <a:pPr algn="ctr"/>
+            <a:endParaRPr/>
           </a:p>
         </p:txBody>
       </p:sp>
@@ -13122,6 +13098,7 @@
           <a:lstStyle/>
           <a:p>
             <a:pPr algn="ctr"/>
+            <a:endParaRPr/>
           </a:p>
         </p:txBody>
       </p:sp>
@@ -13168,6 +13145,7 @@
           <a:lstStyle/>
           <a:p>
             <a:pPr algn="ctr"/>
+            <a:endParaRPr/>
           </a:p>
         </p:txBody>
       </p:sp>
@@ -13214,6 +13192,7 @@
           <a:lstStyle/>
           <a:p>
             <a:pPr algn="ctr"/>
+            <a:endParaRPr/>
           </a:p>
         </p:txBody>
       </p:sp>
@@ -13260,6 +13239,7 @@
           <a:lstStyle/>
           <a:p>
             <a:pPr algn="ctr"/>
+            <a:endParaRPr/>
           </a:p>
         </p:txBody>
       </p:sp>
@@ -13306,6 +13286,7 @@
           <a:lstStyle/>
           <a:p>
             <a:pPr algn="ctr"/>
+            <a:endParaRPr/>
           </a:p>
         </p:txBody>
       </p:sp>
@@ -13352,6 +13333,7 @@
           <a:lstStyle/>
           <a:p>
             <a:pPr algn="ctr"/>
+            <a:endParaRPr/>
           </a:p>
         </p:txBody>
       </p:sp>
@@ -13398,6 +13380,7 @@
           <a:lstStyle/>
           <a:p>
             <a:pPr algn="ctr"/>
+            <a:endParaRPr/>
           </a:p>
         </p:txBody>
       </p:sp>
@@ -13444,6 +13427,7 @@
           <a:lstStyle/>
           <a:p>
             <a:pPr algn="ctr"/>
+            <a:endParaRPr/>
           </a:p>
         </p:txBody>
       </p:sp>
@@ -13490,6 +13474,7 @@
           <a:lstStyle/>
           <a:p>
             <a:pPr algn="ctr"/>
+            <a:endParaRPr/>
           </a:p>
         </p:txBody>
       </p:sp>
@@ -13536,6 +13521,7 @@
           <a:lstStyle/>
           <a:p>
             <a:pPr algn="ctr"/>
+            <a:endParaRPr/>
           </a:p>
         </p:txBody>
       </p:sp>
@@ -13582,6 +13568,7 @@
           <a:lstStyle/>
           <a:p>
             <a:pPr algn="ctr"/>
+            <a:endParaRPr/>
           </a:p>
         </p:txBody>
       </p:sp>
@@ -13628,6 +13615,7 @@
           <a:lstStyle/>
           <a:p>
             <a:pPr algn="ctr"/>
+            <a:endParaRPr/>
           </a:p>
         </p:txBody>
       </p:sp>
@@ -13674,6 +13662,7 @@
           <a:lstStyle/>
           <a:p>
             <a:pPr algn="ctr"/>
+            <a:endParaRPr/>
           </a:p>
         </p:txBody>
       </p:sp>
@@ -13720,6 +13709,7 @@
           <a:lstStyle/>
           <a:p>
             <a:pPr algn="ctr"/>
+            <a:endParaRPr/>
           </a:p>
         </p:txBody>
       </p:sp>
@@ -13766,6 +13756,7 @@
           <a:lstStyle/>
           <a:p>
             <a:pPr algn="ctr"/>
+            <a:endParaRPr/>
           </a:p>
         </p:txBody>
       </p:sp>
@@ -13812,6 +13803,7 @@
           <a:lstStyle/>
           <a:p>
             <a:pPr algn="ctr"/>
+            <a:endParaRPr/>
           </a:p>
         </p:txBody>
       </p:sp>
@@ -13858,6 +13850,7 @@
           <a:lstStyle/>
           <a:p>
             <a:pPr algn="ctr"/>
+            <a:endParaRPr/>
           </a:p>
         </p:txBody>
       </p:sp>
@@ -13904,6 +13897,7 @@
           <a:lstStyle/>
           <a:p>
             <a:pPr algn="ctr"/>
+            <a:endParaRPr/>
           </a:p>
         </p:txBody>
       </p:sp>
@@ -13948,6 +13942,7 @@
           <a:lstStyle/>
           <a:p>
             <a:pPr algn="ctr"/>
+            <a:endParaRPr/>
           </a:p>
         </p:txBody>
       </p:sp>
@@ -13968,7 +13963,7 @@
           <a:noFill/>
         </p:spPr>
         <p:txBody>
-          <a:bodyPr wrap="square" lIns="0" rIns="0" tIns="0" bIns="0" anchor="ctr">
+          <a:bodyPr wrap="square" lIns="0" tIns="0" rIns="0" bIns="0" anchor="ctr">
             <a:spAutoFit/>
           </a:bodyPr>
           <a:lstStyle/>
@@ -14029,6 +14024,7 @@
           <a:lstStyle/>
           <a:p>
             <a:pPr algn="ctr"/>
+            <a:endParaRPr/>
           </a:p>
         </p:txBody>
       </p:sp>
@@ -14049,7 +14045,7 @@
           <a:noFill/>
         </p:spPr>
         <p:txBody>
-          <a:bodyPr wrap="square" lIns="0" rIns="0" tIns="0" bIns="0" anchor="ctr">
+          <a:bodyPr wrap="square" lIns="0" tIns="0" rIns="0" bIns="0" anchor="ctr">
             <a:spAutoFit/>
           </a:bodyPr>
           <a:lstStyle/>
@@ -14110,6 +14106,7 @@
           <a:lstStyle/>
           <a:p>
             <a:pPr algn="ctr"/>
+            <a:endParaRPr/>
           </a:p>
         </p:txBody>
       </p:sp>
@@ -14130,7 +14127,7 @@
           <a:noFill/>
         </p:spPr>
         <p:txBody>
-          <a:bodyPr wrap="square" lIns="0" rIns="0" tIns="0" bIns="0" anchor="ctr">
+          <a:bodyPr wrap="square" lIns="0" tIns="0" rIns="0" bIns="0" anchor="ctr">
             <a:spAutoFit/>
           </a:bodyPr>
           <a:lstStyle/>
@@ -14191,6 +14188,7 @@
           <a:lstStyle/>
           <a:p>
             <a:pPr algn="ctr"/>
+            <a:endParaRPr/>
           </a:p>
         </p:txBody>
       </p:sp>
@@ -14211,7 +14209,7 @@
           <a:noFill/>
         </p:spPr>
         <p:txBody>
-          <a:bodyPr wrap="square" lIns="0" rIns="0" tIns="0" bIns="0" anchor="ctr">
+          <a:bodyPr wrap="square" lIns="0" tIns="0" rIns="0" bIns="0" anchor="ctr">
             <a:spAutoFit/>
           </a:bodyPr>
           <a:lstStyle/>
@@ -14274,6 +14272,7 @@
           <a:lstStyle/>
           <a:p>
             <a:pPr algn="ctr"/>
+            <a:endParaRPr/>
           </a:p>
         </p:txBody>
       </p:sp>
@@ -14294,7 +14293,7 @@
           <a:noFill/>
         </p:spPr>
         <p:txBody>
-          <a:bodyPr wrap="square" lIns="0" rIns="0" tIns="0" bIns="0" anchor="ctr">
+          <a:bodyPr wrap="square" lIns="0" tIns="0" rIns="0" bIns="0" anchor="ctr">
             <a:spAutoFit/>
           </a:bodyPr>
           <a:lstStyle/>
@@ -14331,7 +14330,7 @@
           <a:noFill/>
         </p:spPr>
         <p:txBody>
-          <a:bodyPr wrap="square" lIns="0" rIns="0" tIns="0" bIns="0" anchor="ctr">
+          <a:bodyPr wrap="square" lIns="0" tIns="0" rIns="0" bIns="0" anchor="ctr">
             <a:spAutoFit/>
           </a:bodyPr>
           <a:lstStyle/>
@@ -14404,7 +14403,7 @@
           <a:noFill/>
         </p:spPr>
         <p:txBody>
-          <a:bodyPr wrap="square" lIns="0" rIns="0" tIns="0" bIns="0" anchor="ctr">
+          <a:bodyPr wrap="square" lIns="0" tIns="0" rIns="0" bIns="0" anchor="ctr">
             <a:spAutoFit/>
           </a:bodyPr>
           <a:lstStyle/>
@@ -14469,6 +14468,7 @@
           <a:lstStyle/>
           <a:p>
             <a:pPr algn="ctr"/>
+            <a:endParaRPr/>
           </a:p>
         </p:txBody>
       </p:sp>
@@ -14489,7 +14489,7 @@
           <a:noFill/>
         </p:spPr>
         <p:txBody>
-          <a:bodyPr wrap="square" lIns="0" rIns="0" tIns="0" bIns="0" anchor="ctr">
+          <a:bodyPr wrap="square" lIns="0" tIns="0" rIns="0" bIns="0" anchor="ctr">
             <a:spAutoFit/>
           </a:bodyPr>
           <a:lstStyle/>
@@ -14526,7 +14526,7 @@
           <a:noFill/>
         </p:spPr>
         <p:txBody>
-          <a:bodyPr wrap="square" lIns="0" rIns="0" tIns="0" bIns="0" anchor="ctr">
+          <a:bodyPr wrap="square" lIns="0" tIns="0" rIns="0" bIns="0" anchor="ctr">
             <a:spAutoFit/>
           </a:bodyPr>
           <a:lstStyle/>
@@ -14607,7 +14607,6 @@
           <a:bodyPr/>
           <a:lstStyle/>
           <a:p>
-            <a:pPr/>
             <a:endParaRPr lang="ko-KR" altLang="en-US">
               <a:latin typeface="Pretendard"/>
               <a:ea typeface="Pretendard"/>
@@ -14773,7 +14772,6 @@
           <a:bodyPr/>
           <a:lstStyle/>
           <a:p>
-            <a:pPr/>
             <a:endParaRPr lang="ko-KR" altLang="en-US">
               <a:latin typeface="Pretendard"/>
               <a:ea typeface="Pretendard"/>
@@ -14976,7 +14974,6 @@
           <a:bodyPr/>
           <a:lstStyle/>
           <a:p>
-            <a:pPr/>
             <a:endParaRPr lang="ko-KR" altLang="en-US">
               <a:latin typeface="Pretendard"/>
               <a:ea typeface="Pretendard"/>
@@ -15013,7 +15010,6 @@
           <a:bodyPr/>
           <a:lstStyle/>
           <a:p>
-            <a:pPr/>
             <a:endParaRPr lang="ko-KR" altLang="en-US">
               <a:latin typeface="Pretendard"/>
               <a:ea typeface="Pretendard"/>
@@ -15207,7 +15203,6 @@
           <a:bodyPr/>
           <a:lstStyle/>
           <a:p>
-            <a:pPr/>
             <a:endParaRPr lang="ko-KR" altLang="en-US">
               <a:latin typeface="Pretendard"/>
               <a:ea typeface="Pretendard"/>
@@ -15552,7 +15547,7 @@
           <a:noFill/>
         </p:spPr>
         <p:txBody>
-          <a:bodyPr wrap="none" lIns="0" rIns="0" tIns="0" bIns="0">
+          <a:bodyPr wrap="none" lIns="0" tIns="0" rIns="0" bIns="0">
             <a:spAutoFit/>
           </a:bodyPr>
           <a:lstStyle/>
@@ -15646,6 +15641,7 @@
           <a:lstStyle/>
           <a:p>
             <a:pPr algn="ctr"/>
+            <a:endParaRPr/>
           </a:p>
         </p:txBody>
       </p:sp>
@@ -15690,6 +15686,7 @@
           <a:lstStyle/>
           <a:p>
             <a:pPr algn="ctr"/>
+            <a:endParaRPr/>
           </a:p>
         </p:txBody>
       </p:sp>
@@ -15734,6 +15731,7 @@
           <a:lstStyle/>
           <a:p>
             <a:pPr algn="ctr"/>
+            <a:endParaRPr/>
           </a:p>
         </p:txBody>
       </p:sp>
@@ -15765,7 +15763,6 @@
           <a:bodyPr/>
           <a:lstStyle/>
           <a:p>
-            <a:pPr/>
             <a:endParaRPr lang="ko-KR" altLang="en-US">
               <a:latin typeface="Pretendard"/>
               <a:ea typeface="Pretendard"/>
@@ -15931,7 +15928,6 @@
           <a:bodyPr/>
           <a:lstStyle/>
           <a:p>
-            <a:pPr/>
             <a:endParaRPr lang="ko-KR" altLang="en-US">
               <a:latin typeface="Pretendard"/>
               <a:ea typeface="Pretendard"/>
@@ -16011,7 +16007,6 @@
           <a:bodyPr/>
           <a:lstStyle/>
           <a:p>
-            <a:pPr/>
             <a:endParaRPr lang="ko-KR" altLang="en-US">
               <a:latin typeface="Pretendard"/>
               <a:ea typeface="Pretendard"/>
@@ -16048,7 +16043,6 @@
           <a:bodyPr/>
           <a:lstStyle/>
           <a:p>
-            <a:pPr/>
             <a:endParaRPr lang="ko-KR" altLang="en-US">
               <a:latin typeface="Pretendard"/>
               <a:ea typeface="Pretendard"/>
@@ -16228,7 +16222,6 @@
           <a:bodyPr/>
           <a:lstStyle/>
           <a:p>
-            <a:pPr/>
             <a:endParaRPr lang="ko-KR" altLang="en-US">
               <a:latin typeface="Pretendard"/>
               <a:ea typeface="Pretendard"/>
@@ -16265,7 +16258,6 @@
           <a:bodyPr/>
           <a:lstStyle/>
           <a:p>
-            <a:pPr/>
             <a:endParaRPr lang="ko-KR" altLang="en-US">
               <a:latin typeface="Pretendard"/>
               <a:ea typeface="Pretendard"/>
@@ -16463,7 +16455,7 @@
           <a:noFill/>
         </p:spPr>
         <p:txBody>
-          <a:bodyPr wrap="none" lIns="0" rIns="0" tIns="0" bIns="0">
+          <a:bodyPr wrap="none" lIns="0" tIns="0" rIns="0" bIns="0">
             <a:spAutoFit/>
           </a:bodyPr>
           <a:lstStyle/>
@@ -16535,7 +16527,7 @@
           <a:noFill/>
         </p:spPr>
         <p:txBody>
-          <a:bodyPr wrap="square" lIns="0" rIns="0" tIns="0" bIns="0" anchor="ctr">
+          <a:bodyPr wrap="square" lIns="0" tIns="0" rIns="0" bIns="0" anchor="ctr">
             <a:spAutoFit/>
           </a:bodyPr>
           <a:lstStyle/>
@@ -16572,7 +16564,7 @@
           <a:noFill/>
         </p:spPr>
         <p:txBody>
-          <a:bodyPr wrap="square" lIns="0" rIns="0" tIns="0" bIns="0" anchor="ctr">
+          <a:bodyPr wrap="square" lIns="0" tIns="0" rIns="0" bIns="0" anchor="ctr">
             <a:spAutoFit/>
           </a:bodyPr>
           <a:lstStyle/>
@@ -16609,7 +16601,7 @@
           <a:noFill/>
         </p:spPr>
         <p:txBody>
-          <a:bodyPr wrap="square" lIns="0" rIns="0" tIns="0" bIns="0" anchor="ctr">
+          <a:bodyPr wrap="square" lIns="0" tIns="0" rIns="0" bIns="0" anchor="ctr">
             <a:spAutoFit/>
           </a:bodyPr>
           <a:lstStyle/>
@@ -16670,6 +16662,7 @@
           <a:lstStyle/>
           <a:p>
             <a:pPr algn="ctr"/>
+            <a:endParaRPr/>
           </a:p>
         </p:txBody>
       </p:sp>
@@ -16690,7 +16683,7 @@
           <a:noFill/>
         </p:spPr>
         <p:txBody>
-          <a:bodyPr wrap="square" lIns="0" rIns="0" tIns="0" bIns="0" anchor="ctr">
+          <a:bodyPr wrap="square" lIns="0" tIns="0" rIns="0" bIns="0" anchor="ctr">
             <a:spAutoFit/>
           </a:bodyPr>
           <a:lstStyle/>
@@ -16727,7 +16720,7 @@
           <a:noFill/>
         </p:spPr>
         <p:txBody>
-          <a:bodyPr wrap="square" lIns="0" rIns="0" tIns="0" bIns="0" anchor="ctr">
+          <a:bodyPr wrap="square" lIns="0" tIns="0" rIns="0" bIns="0" anchor="ctr">
             <a:spAutoFit/>
           </a:bodyPr>
           <a:lstStyle/>
@@ -16788,6 +16781,7 @@
           <a:lstStyle/>
           <a:p>
             <a:pPr algn="ctr"/>
+            <a:endParaRPr/>
           </a:p>
         </p:txBody>
       </p:sp>
@@ -16808,7 +16802,7 @@
           <a:noFill/>
         </p:spPr>
         <p:txBody>
-          <a:bodyPr wrap="square" lIns="0" rIns="0" tIns="0" bIns="0" anchor="ctr">
+          <a:bodyPr wrap="square" lIns="0" tIns="0" rIns="0" bIns="0" anchor="ctr">
             <a:spAutoFit/>
           </a:bodyPr>
           <a:lstStyle/>
@@ -16881,7 +16875,7 @@
           <a:noFill/>
         </p:spPr>
         <p:txBody>
-          <a:bodyPr wrap="square" lIns="0" rIns="0" tIns="0" bIns="0" anchor="ctr">
+          <a:bodyPr wrap="square" lIns="0" tIns="0" rIns="0" bIns="0" anchor="ctr">
             <a:spAutoFit/>
           </a:bodyPr>
           <a:lstStyle/>
@@ -16943,6 +16937,7 @@
           <a:lstStyle/>
           <a:p>
             <a:pPr algn="ctr"/>
+            <a:endParaRPr/>
           </a:p>
         </p:txBody>
       </p:sp>
@@ -16963,7 +16958,7 @@
           <a:noFill/>
         </p:spPr>
         <p:txBody>
-          <a:bodyPr wrap="square" lIns="0" rIns="0" tIns="0" bIns="0" anchor="ctr">
+          <a:bodyPr wrap="square" lIns="0" tIns="0" rIns="0" bIns="0" anchor="ctr">
             <a:spAutoFit/>
           </a:bodyPr>
           <a:lstStyle/>
@@ -17036,7 +17031,7 @@
           <a:noFill/>
         </p:spPr>
         <p:txBody>
-          <a:bodyPr wrap="square" lIns="0" rIns="0" tIns="0" bIns="0" anchor="ctr">
+          <a:bodyPr wrap="square" lIns="0" tIns="0" rIns="0" bIns="0" anchor="ctr">
             <a:spAutoFit/>
           </a:bodyPr>
           <a:lstStyle/>
@@ -17098,6 +17093,7 @@
           <a:lstStyle/>
           <a:p>
             <a:pPr algn="ctr"/>
+            <a:endParaRPr/>
           </a:p>
         </p:txBody>
       </p:sp>
@@ -17118,7 +17114,7 @@
           <a:noFill/>
         </p:spPr>
         <p:txBody>
-          <a:bodyPr wrap="square" lIns="0" rIns="0" tIns="0" bIns="0" anchor="ctr">
+          <a:bodyPr wrap="square" lIns="0" tIns="0" rIns="0" bIns="0" anchor="ctr">
             <a:spAutoFit/>
           </a:bodyPr>
           <a:lstStyle/>
@@ -17191,7 +17187,7 @@
           <a:noFill/>
         </p:spPr>
         <p:txBody>
-          <a:bodyPr wrap="square" lIns="0" rIns="0" tIns="0" bIns="0" anchor="ctr">
+          <a:bodyPr wrap="square" lIns="0" tIns="0" rIns="0" bIns="0" anchor="ctr">
             <a:spAutoFit/>
           </a:bodyPr>
           <a:lstStyle/>
@@ -17253,6 +17249,7 @@
           <a:lstStyle/>
           <a:p>
             <a:pPr algn="ctr"/>
+            <a:endParaRPr/>
           </a:p>
         </p:txBody>
       </p:sp>
@@ -17273,7 +17270,7 @@
           <a:noFill/>
         </p:spPr>
         <p:txBody>
-          <a:bodyPr wrap="square" lIns="0" rIns="0" tIns="0" bIns="0" anchor="ctr">
+          <a:bodyPr wrap="square" lIns="0" tIns="0" rIns="0" bIns="0" anchor="ctr">
             <a:spAutoFit/>
           </a:bodyPr>
           <a:lstStyle/>
@@ -17346,7 +17343,7 @@
           <a:noFill/>
         </p:spPr>
         <p:txBody>
-          <a:bodyPr wrap="square" lIns="0" rIns="0" tIns="0" bIns="0" anchor="ctr">
+          <a:bodyPr wrap="square" lIns="0" tIns="0" rIns="0" bIns="0" anchor="ctr">
             <a:spAutoFit/>
           </a:bodyPr>
           <a:lstStyle/>
@@ -17407,6 +17404,7 @@
           <a:lstStyle/>
           <a:p>
             <a:pPr algn="ctr"/>
+            <a:endParaRPr/>
           </a:p>
         </p:txBody>
       </p:sp>
@@ -17427,7 +17425,7 @@
           <a:noFill/>
         </p:spPr>
         <p:txBody>
-          <a:bodyPr wrap="square" lIns="0" rIns="0" tIns="0" bIns="0" anchor="ctr">
+          <a:bodyPr wrap="square" lIns="0" tIns="0" rIns="0" bIns="0" anchor="ctr">
             <a:spAutoFit/>
           </a:bodyPr>
           <a:lstStyle/>
@@ -17500,7 +17498,7 @@
           <a:noFill/>
         </p:spPr>
         <p:txBody>
-          <a:bodyPr wrap="square" lIns="0" rIns="0" tIns="0" bIns="0" anchor="ctr">
+          <a:bodyPr wrap="square" lIns="0" tIns="0" rIns="0" bIns="0" anchor="ctr">
             <a:spAutoFit/>
           </a:bodyPr>
           <a:lstStyle/>
@@ -17561,6 +17559,7 @@
           <a:lstStyle/>
           <a:p>
             <a:pPr algn="ctr"/>
+            <a:endParaRPr/>
           </a:p>
         </p:txBody>
       </p:sp>
@@ -17581,7 +17580,7 @@
           <a:noFill/>
         </p:spPr>
         <p:txBody>
-          <a:bodyPr wrap="square" lIns="0" rIns="0" tIns="0" bIns="0" anchor="ctr">
+          <a:bodyPr wrap="square" lIns="0" tIns="0" rIns="0" bIns="0" anchor="ctr">
             <a:spAutoFit/>
           </a:bodyPr>
           <a:lstStyle/>
@@ -17618,7 +17617,7 @@
           <a:noFill/>
         </p:spPr>
         <p:txBody>
-          <a:bodyPr wrap="square" lIns="0" rIns="0" tIns="0" bIns="0" anchor="ctr">
+          <a:bodyPr wrap="square" lIns="0" tIns="0" rIns="0" bIns="0" anchor="ctr">
             <a:spAutoFit/>
           </a:bodyPr>
           <a:lstStyle/>
@@ -17655,7 +17654,7 @@
           <a:noFill/>
         </p:spPr>
         <p:txBody>
-          <a:bodyPr wrap="square" lIns="0" rIns="0" tIns="0" bIns="0" anchor="ctr">
+          <a:bodyPr wrap="square" lIns="0" tIns="0" rIns="0" bIns="0" anchor="ctr">
             <a:spAutoFit/>
           </a:bodyPr>
           <a:lstStyle/>
@@ -17736,7 +17735,6 @@
           <a:bodyPr/>
           <a:lstStyle/>
           <a:p>
-            <a:pPr/>
             <a:endParaRPr lang="ko-KR" altLang="en-US">
               <a:latin typeface="Pretendard"/>
               <a:ea typeface="Pretendard"/>
@@ -17902,7 +17900,6 @@
           <a:bodyPr/>
           <a:lstStyle/>
           <a:p>
-            <a:pPr/>
             <a:endParaRPr lang="ko-KR" altLang="en-US">
               <a:latin typeface="Pretendard"/>
               <a:ea typeface="Pretendard"/>
@@ -17939,7 +17936,6 @@
           <a:bodyPr/>
           <a:lstStyle/>
           <a:p>
-            <a:pPr/>
             <a:endParaRPr lang="ko-KR" altLang="en-US">
               <a:latin typeface="Pretendard"/>
               <a:ea typeface="Pretendard"/>
@@ -18062,7 +18058,6 @@
           <a:bodyPr/>
           <a:lstStyle/>
           <a:p>
-            <a:pPr/>
             <a:endParaRPr lang="ko-KR" altLang="en-US">
               <a:latin typeface="Pretendard"/>
               <a:ea typeface="Pretendard"/>
@@ -18099,7 +18094,6 @@
           <a:bodyPr/>
           <a:lstStyle/>
           <a:p>
-            <a:pPr/>
             <a:endParaRPr lang="ko-KR" altLang="en-US">
               <a:latin typeface="Pretendard"/>
               <a:ea typeface="Pretendard"/>
@@ -18222,7 +18216,6 @@
           <a:bodyPr/>
           <a:lstStyle/>
           <a:p>
-            <a:pPr/>
             <a:endParaRPr lang="ko-KR" altLang="en-US">
               <a:latin typeface="Pretendard"/>
               <a:ea typeface="Pretendard"/>
@@ -18259,7 +18252,6 @@
           <a:bodyPr/>
           <a:lstStyle/>
           <a:p>
-            <a:pPr/>
             <a:endParaRPr lang="ko-KR" altLang="en-US">
               <a:latin typeface="Pretendard"/>
               <a:ea typeface="Pretendard"/>
@@ -18382,7 +18374,6 @@
           <a:bodyPr/>
           <a:lstStyle/>
           <a:p>
-            <a:pPr/>
             <a:endParaRPr lang="ko-KR" altLang="en-US">
               <a:latin typeface="Pretendard"/>
               <a:ea typeface="Pretendard"/>
@@ -18419,7 +18410,6 @@
           <a:bodyPr/>
           <a:lstStyle/>
           <a:p>
-            <a:pPr/>
             <a:endParaRPr lang="ko-KR" altLang="en-US">
               <a:latin typeface="Pretendard"/>
               <a:ea typeface="Pretendard"/>
@@ -18542,7 +18532,6 @@
           <a:bodyPr/>
           <a:lstStyle/>
           <a:p>
-            <a:pPr/>
             <a:endParaRPr lang="ko-KR" altLang="en-US">
               <a:latin typeface="Pretendard"/>
               <a:ea typeface="Pretendard"/>
@@ -18579,7 +18568,6 @@
           <a:bodyPr/>
           <a:lstStyle/>
           <a:p>
-            <a:pPr/>
             <a:endParaRPr lang="ko-KR" altLang="en-US">
               <a:latin typeface="Pretendard"/>
               <a:ea typeface="Pretendard"/>
@@ -18691,7 +18679,7 @@
           <a:noFill/>
         </p:spPr>
         <p:txBody>
-          <a:bodyPr wrap="none" lIns="0" rIns="0" tIns="0" bIns="0">
+          <a:bodyPr wrap="none" lIns="0" tIns="0" rIns="0" bIns="0">
             <a:spAutoFit/>
           </a:bodyPr>
           <a:lstStyle/>
@@ -18728,7 +18716,7 @@
           <a:noFill/>
         </p:spPr>
         <p:txBody>
-          <a:bodyPr wrap="square" lIns="0" rIns="0" tIns="0" bIns="0" anchor="ctr">
+          <a:bodyPr wrap="square" lIns="0" tIns="0" rIns="0" bIns="0" anchor="ctr">
             <a:spAutoFit/>
           </a:bodyPr>
           <a:lstStyle/>
@@ -18791,6 +18779,7 @@
           <a:lstStyle/>
           <a:p>
             <a:pPr algn="ctr"/>
+            <a:endParaRPr/>
           </a:p>
         </p:txBody>
       </p:sp>
@@ -18837,6 +18826,7 @@
           <a:lstStyle/>
           <a:p>
             <a:pPr algn="ctr"/>
+            <a:endParaRPr/>
           </a:p>
         </p:txBody>
       </p:sp>
@@ -18883,6 +18873,7 @@
           <a:lstStyle/>
           <a:p>
             <a:pPr algn="ctr"/>
+            <a:endParaRPr/>
           </a:p>
         </p:txBody>
       </p:sp>
@@ -18929,6 +18920,7 @@
           <a:lstStyle/>
           <a:p>
             <a:pPr algn="ctr"/>
+            <a:endParaRPr/>
           </a:p>
         </p:txBody>
       </p:sp>
@@ -18975,6 +18967,7 @@
           <a:lstStyle/>
           <a:p>
             <a:pPr algn="ctr"/>
+            <a:endParaRPr/>
           </a:p>
         </p:txBody>
       </p:sp>
@@ -19021,6 +19014,7 @@
           <a:lstStyle/>
           <a:p>
             <a:pPr algn="ctr"/>
+            <a:endParaRPr/>
           </a:p>
         </p:txBody>
       </p:sp>
@@ -19067,6 +19061,7 @@
           <a:lstStyle/>
           <a:p>
             <a:pPr algn="ctr"/>
+            <a:endParaRPr/>
           </a:p>
         </p:txBody>
       </p:sp>
@@ -19113,6 +19108,7 @@
           <a:lstStyle/>
           <a:p>
             <a:pPr algn="ctr"/>
+            <a:endParaRPr/>
           </a:p>
         </p:txBody>
       </p:sp>
@@ -19157,6 +19153,7 @@
           <a:lstStyle/>
           <a:p>
             <a:pPr algn="ctr"/>
+            <a:endParaRPr/>
           </a:p>
         </p:txBody>
       </p:sp>
@@ -19177,7 +19174,7 @@
           <a:noFill/>
         </p:spPr>
         <p:txBody>
-          <a:bodyPr wrap="square" lIns="0" rIns="0" tIns="0" bIns="0" anchor="ctr">
+          <a:bodyPr wrap="square" lIns="0" tIns="0" rIns="0" bIns="0" anchor="ctr">
             <a:spAutoFit/>
           </a:bodyPr>
           <a:lstStyle/>
@@ -19214,7 +19211,7 @@
           <a:noFill/>
         </p:spPr>
         <p:txBody>
-          <a:bodyPr wrap="square" lIns="0" rIns="0" tIns="0" bIns="0" anchor="ctr">
+          <a:bodyPr wrap="square" lIns="0" tIns="0" rIns="0" bIns="0" anchor="ctr">
             <a:spAutoFit/>
           </a:bodyPr>
           <a:lstStyle/>
@@ -19275,6 +19272,7 @@
           <a:lstStyle/>
           <a:p>
             <a:pPr algn="ctr"/>
+            <a:endParaRPr/>
           </a:p>
         </p:txBody>
       </p:sp>
@@ -19295,7 +19293,7 @@
           <a:noFill/>
         </p:spPr>
         <p:txBody>
-          <a:bodyPr wrap="square" lIns="0" rIns="0" tIns="0" bIns="0" anchor="ctr">
+          <a:bodyPr wrap="square" lIns="0" tIns="0" rIns="0" bIns="0" anchor="ctr">
             <a:spAutoFit/>
           </a:bodyPr>
           <a:lstStyle/>
@@ -19332,7 +19330,7 @@
           <a:noFill/>
         </p:spPr>
         <p:txBody>
-          <a:bodyPr wrap="square" lIns="0" rIns="0" tIns="0" bIns="0" anchor="ctr">
+          <a:bodyPr wrap="square" lIns="0" tIns="0" rIns="0" bIns="0" anchor="ctr">
             <a:spAutoFit/>
           </a:bodyPr>
           <a:lstStyle/>
@@ -19393,6 +19391,7 @@
           <a:lstStyle/>
           <a:p>
             <a:pPr algn="ctr"/>
+            <a:endParaRPr/>
           </a:p>
         </p:txBody>
       </p:sp>
@@ -19413,7 +19412,7 @@
           <a:noFill/>
         </p:spPr>
         <p:txBody>
-          <a:bodyPr wrap="square" lIns="0" rIns="0" tIns="0" bIns="0" anchor="ctr">
+          <a:bodyPr wrap="square" lIns="0" tIns="0" rIns="0" bIns="0" anchor="ctr">
             <a:spAutoFit/>
           </a:bodyPr>
           <a:lstStyle/>
@@ -19450,7 +19449,7 @@
           <a:noFill/>
         </p:spPr>
         <p:txBody>
-          <a:bodyPr wrap="square" lIns="0" rIns="0" tIns="0" bIns="0" anchor="ctr">
+          <a:bodyPr wrap="square" lIns="0" tIns="0" rIns="0" bIns="0" anchor="ctr">
             <a:spAutoFit/>
           </a:bodyPr>
           <a:lstStyle/>
@@ -19511,6 +19510,7 @@
           <a:lstStyle/>
           <a:p>
             <a:pPr algn="ctr"/>
+            <a:endParaRPr/>
           </a:p>
         </p:txBody>
       </p:sp>
@@ -19531,7 +19531,7 @@
           <a:noFill/>
         </p:spPr>
         <p:txBody>
-          <a:bodyPr wrap="square" lIns="0" rIns="0" tIns="0" bIns="0" anchor="ctr">
+          <a:bodyPr wrap="square" lIns="0" tIns="0" rIns="0" bIns="0" anchor="ctr">
             <a:spAutoFit/>
           </a:bodyPr>
           <a:lstStyle/>
@@ -19568,7 +19568,7 @@
           <a:noFill/>
         </p:spPr>
         <p:txBody>
-          <a:bodyPr wrap="square" lIns="0" rIns="0" tIns="0" bIns="0" anchor="ctr">
+          <a:bodyPr wrap="square" lIns="0" tIns="0" rIns="0" bIns="0" anchor="ctr">
             <a:spAutoFit/>
           </a:bodyPr>
           <a:lstStyle/>
@@ -19629,6 +19629,7 @@
           <a:lstStyle/>
           <a:p>
             <a:pPr algn="ctr"/>
+            <a:endParaRPr/>
           </a:p>
         </p:txBody>
       </p:sp>
@@ -19649,7 +19650,7 @@
           <a:noFill/>
         </p:spPr>
         <p:txBody>
-          <a:bodyPr wrap="square" lIns="0" rIns="0" tIns="0" bIns="0" anchor="ctr">
+          <a:bodyPr wrap="square" lIns="0" tIns="0" rIns="0" bIns="0" anchor="ctr">
             <a:spAutoFit/>
           </a:bodyPr>
           <a:lstStyle/>
@@ -19686,7 +19687,7 @@
           <a:noFill/>
         </p:spPr>
         <p:txBody>
-          <a:bodyPr wrap="square" lIns="0" rIns="0" tIns="0" bIns="0" anchor="ctr">
+          <a:bodyPr wrap="square" lIns="0" tIns="0" rIns="0" bIns="0" anchor="ctr">
             <a:spAutoFit/>
           </a:bodyPr>
           <a:lstStyle/>
@@ -19747,6 +19748,7 @@
           <a:lstStyle/>
           <a:p>
             <a:pPr algn="ctr"/>
+            <a:endParaRPr/>
           </a:p>
         </p:txBody>
       </p:sp>
@@ -19767,7 +19769,7 @@
           <a:noFill/>
         </p:spPr>
         <p:txBody>
-          <a:bodyPr wrap="square" lIns="0" rIns="0" tIns="0" bIns="0" anchor="ctr">
+          <a:bodyPr wrap="square" lIns="0" tIns="0" rIns="0" bIns="0" anchor="ctr">
             <a:spAutoFit/>
           </a:bodyPr>
           <a:lstStyle/>
@@ -19804,7 +19806,7 @@
           <a:noFill/>
         </p:spPr>
         <p:txBody>
-          <a:bodyPr wrap="square" lIns="0" rIns="0" tIns="0" bIns="0" anchor="ctr">
+          <a:bodyPr wrap="square" lIns="0" tIns="0" rIns="0" bIns="0" anchor="ctr">
             <a:spAutoFit/>
           </a:bodyPr>
           <a:lstStyle/>
@@ -19865,6 +19867,7 @@
           <a:lstStyle/>
           <a:p>
             <a:pPr algn="ctr"/>
+            <a:endParaRPr/>
           </a:p>
         </p:txBody>
       </p:sp>
@@ -19885,7 +19888,7 @@
           <a:noFill/>
         </p:spPr>
         <p:txBody>
-          <a:bodyPr wrap="square" lIns="0" rIns="0" tIns="0" bIns="0" anchor="ctr">
+          <a:bodyPr wrap="square" lIns="0" tIns="0" rIns="0" bIns="0" anchor="ctr">
             <a:spAutoFit/>
           </a:bodyPr>
           <a:lstStyle/>
@@ -19922,7 +19925,7 @@
           <a:noFill/>
         </p:spPr>
         <p:txBody>
-          <a:bodyPr wrap="square" lIns="0" rIns="0" tIns="0" bIns="0" anchor="ctr">
+          <a:bodyPr wrap="square" lIns="0" tIns="0" rIns="0" bIns="0" anchor="ctr">
             <a:spAutoFit/>
           </a:bodyPr>
           <a:lstStyle/>
@@ -19983,6 +19986,7 @@
           <a:lstStyle/>
           <a:p>
             <a:pPr algn="ctr"/>
+            <a:endParaRPr/>
           </a:p>
         </p:txBody>
       </p:sp>
@@ -20003,7 +20007,7 @@
           <a:noFill/>
         </p:spPr>
         <p:txBody>
-          <a:bodyPr wrap="square" lIns="0" rIns="0" tIns="0" bIns="0" anchor="ctr">
+          <a:bodyPr wrap="square" lIns="0" tIns="0" rIns="0" bIns="0" anchor="ctr">
             <a:spAutoFit/>
           </a:bodyPr>
           <a:lstStyle/>
@@ -20040,7 +20044,7 @@
           <a:noFill/>
         </p:spPr>
         <p:txBody>
-          <a:bodyPr wrap="square" lIns="0" rIns="0" tIns="0" bIns="0" anchor="ctr">
+          <a:bodyPr wrap="square" lIns="0" tIns="0" rIns="0" bIns="0" anchor="ctr">
             <a:spAutoFit/>
           </a:bodyPr>
           <a:lstStyle/>
@@ -20077,7 +20081,7 @@
           <a:noFill/>
         </p:spPr>
         <p:txBody>
-          <a:bodyPr wrap="square" lIns="0" rIns="0" tIns="0" bIns="0" anchor="ctr">
+          <a:bodyPr wrap="square" lIns="0" tIns="0" rIns="0" bIns="0" anchor="ctr">
             <a:spAutoFit/>
           </a:bodyPr>
           <a:lstStyle/>
@@ -20140,6 +20144,7 @@
           <a:lstStyle/>
           <a:p>
             <a:pPr algn="ctr"/>
+            <a:endParaRPr/>
           </a:p>
         </p:txBody>
       </p:sp>
@@ -20186,6 +20191,7 @@
           <a:lstStyle/>
           <a:p>
             <a:pPr algn="ctr"/>
+            <a:endParaRPr/>
           </a:p>
         </p:txBody>
       </p:sp>
@@ -20206,7 +20212,7 @@
           <a:noFill/>
         </p:spPr>
         <p:txBody>
-          <a:bodyPr wrap="square" lIns="0" rIns="0" tIns="0" bIns="0" anchor="ctr">
+          <a:bodyPr wrap="square" lIns="0" tIns="0" rIns="0" bIns="0" anchor="ctr">
             <a:spAutoFit/>
           </a:bodyPr>
           <a:lstStyle/>
@@ -20269,6 +20275,7 @@
           <a:lstStyle/>
           <a:p>
             <a:pPr algn="ctr"/>
+            <a:endParaRPr/>
           </a:p>
         </p:txBody>
       </p:sp>
@@ -20289,7 +20296,7 @@
           <a:noFill/>
         </p:spPr>
         <p:txBody>
-          <a:bodyPr wrap="square" lIns="0" rIns="0" tIns="0" bIns="0" anchor="ctr">
+          <a:bodyPr wrap="square" lIns="0" tIns="0" rIns="0" bIns="0" anchor="ctr">
             <a:spAutoFit/>
           </a:bodyPr>
           <a:lstStyle/>
@@ -20352,6 +20359,7 @@
           <a:lstStyle/>
           <a:p>
             <a:pPr algn="ctr"/>
+            <a:endParaRPr/>
           </a:p>
         </p:txBody>
       </p:sp>
@@ -20372,7 +20380,7 @@
           <a:noFill/>
         </p:spPr>
         <p:txBody>
-          <a:bodyPr wrap="square" lIns="0" rIns="0" tIns="0" bIns="0" anchor="ctr">
+          <a:bodyPr wrap="square" lIns="0" tIns="0" rIns="0" bIns="0" anchor="ctr">
             <a:spAutoFit/>
           </a:bodyPr>
           <a:lstStyle/>
@@ -20435,6 +20443,7 @@
           <a:lstStyle/>
           <a:p>
             <a:pPr algn="ctr"/>
+            <a:endParaRPr/>
           </a:p>
         </p:txBody>
       </p:sp>
@@ -20455,7 +20464,7 @@
           <a:noFill/>
         </p:spPr>
         <p:txBody>
-          <a:bodyPr wrap="square" lIns="0" rIns="0" tIns="0" bIns="0" anchor="ctr">
+          <a:bodyPr wrap="square" lIns="0" tIns="0" rIns="0" bIns="0" anchor="ctr">
             <a:spAutoFit/>
           </a:bodyPr>
           <a:lstStyle/>
@@ -20518,6 +20527,7 @@
           <a:lstStyle/>
           <a:p>
             <a:pPr algn="ctr"/>
+            <a:endParaRPr/>
           </a:p>
         </p:txBody>
       </p:sp>
@@ -20538,7 +20548,7 @@
           <a:noFill/>
         </p:spPr>
         <p:txBody>
-          <a:bodyPr wrap="square" lIns="0" rIns="0" tIns="0" bIns="0" anchor="ctr">
+          <a:bodyPr wrap="square" lIns="0" tIns="0" rIns="0" bIns="0" anchor="ctr">
             <a:spAutoFit/>
           </a:bodyPr>
           <a:lstStyle/>
@@ -20601,6 +20611,7 @@
           <a:lstStyle/>
           <a:p>
             <a:pPr algn="ctr"/>
+            <a:endParaRPr/>
           </a:p>
         </p:txBody>
       </p:sp>
@@ -20621,7 +20632,7 @@
           <a:noFill/>
         </p:spPr>
         <p:txBody>
-          <a:bodyPr wrap="square" lIns="0" rIns="0" tIns="0" bIns="0" anchor="ctr">
+          <a:bodyPr wrap="square" lIns="0" tIns="0" rIns="0" bIns="0" anchor="ctr">
             <a:spAutoFit/>
           </a:bodyPr>
           <a:lstStyle/>
@@ -20684,6 +20695,7 @@
           <a:lstStyle/>
           <a:p>
             <a:pPr algn="ctr"/>
+            <a:endParaRPr/>
           </a:p>
         </p:txBody>
       </p:sp>
@@ -20704,7 +20716,7 @@
           <a:noFill/>
         </p:spPr>
         <p:txBody>
-          <a:bodyPr wrap="square" lIns="0" rIns="0" tIns="0" bIns="0" anchor="ctr">
+          <a:bodyPr wrap="square" lIns="0" tIns="0" rIns="0" bIns="0" anchor="ctr">
             <a:spAutoFit/>
           </a:bodyPr>
           <a:lstStyle/>
@@ -20767,6 +20779,7 @@
           <a:lstStyle/>
           <a:p>
             <a:pPr algn="ctr"/>
+            <a:endParaRPr/>
           </a:p>
         </p:txBody>
       </p:sp>
@@ -20787,7 +20800,7 @@
           <a:noFill/>
         </p:spPr>
         <p:txBody>
-          <a:bodyPr wrap="square" lIns="0" rIns="0" tIns="0" bIns="0" anchor="ctr">
+          <a:bodyPr wrap="square" lIns="0" tIns="0" rIns="0" bIns="0" anchor="ctr">
             <a:spAutoFit/>
           </a:bodyPr>
           <a:lstStyle/>
@@ -20850,6 +20863,7 @@
           <a:lstStyle/>
           <a:p>
             <a:pPr algn="ctr"/>
+            <a:endParaRPr/>
           </a:p>
         </p:txBody>
       </p:sp>
@@ -20870,7 +20884,7 @@
           <a:noFill/>
         </p:spPr>
         <p:txBody>
-          <a:bodyPr wrap="square" lIns="0" rIns="0" tIns="0" bIns="0" anchor="ctr">
+          <a:bodyPr wrap="square" lIns="0" tIns="0" rIns="0" bIns="0" anchor="ctr">
             <a:spAutoFit/>
           </a:bodyPr>
           <a:lstStyle/>
@@ -20933,6 +20947,7 @@
           <a:lstStyle/>
           <a:p>
             <a:pPr algn="ctr"/>
+            <a:endParaRPr/>
           </a:p>
         </p:txBody>
       </p:sp>
@@ -20953,7 +20968,7 @@
           <a:noFill/>
         </p:spPr>
         <p:txBody>
-          <a:bodyPr wrap="square" lIns="0" rIns="0" tIns="0" bIns="0" anchor="ctr">
+          <a:bodyPr wrap="square" lIns="0" tIns="0" rIns="0" bIns="0" anchor="ctr">
             <a:spAutoFit/>
           </a:bodyPr>
           <a:lstStyle/>
@@ -21016,6 +21031,7 @@
           <a:lstStyle/>
           <a:p>
             <a:pPr algn="ctr"/>
+            <a:endParaRPr/>
           </a:p>
         </p:txBody>
       </p:sp>
@@ -21036,7 +21052,7 @@
           <a:noFill/>
         </p:spPr>
         <p:txBody>
-          <a:bodyPr wrap="square" lIns="0" rIns="0" tIns="0" bIns="0" anchor="ctr">
+          <a:bodyPr wrap="square" lIns="0" tIns="0" rIns="0" bIns="0" anchor="ctr">
             <a:spAutoFit/>
           </a:bodyPr>
           <a:lstStyle/>
@@ -21099,6 +21115,7 @@
           <a:lstStyle/>
           <a:p>
             <a:pPr algn="ctr"/>
+            <a:endParaRPr/>
           </a:p>
         </p:txBody>
       </p:sp>
@@ -21119,7 +21136,7 @@
           <a:noFill/>
         </p:spPr>
         <p:txBody>
-          <a:bodyPr wrap="square" lIns="0" rIns="0" tIns="0" bIns="0" anchor="ctr">
+          <a:bodyPr wrap="square" lIns="0" tIns="0" rIns="0" bIns="0" anchor="ctr">
             <a:spAutoFit/>
           </a:bodyPr>
           <a:lstStyle/>
@@ -21182,6 +21199,7 @@
           <a:lstStyle/>
           <a:p>
             <a:pPr algn="ctr"/>
+            <a:endParaRPr/>
           </a:p>
         </p:txBody>
       </p:sp>
@@ -21202,7 +21220,7 @@
           <a:noFill/>
         </p:spPr>
         <p:txBody>
-          <a:bodyPr wrap="square" lIns="0" rIns="0" tIns="0" bIns="0" anchor="ctr">
+          <a:bodyPr wrap="square" lIns="0" tIns="0" rIns="0" bIns="0" anchor="ctr">
             <a:spAutoFit/>
           </a:bodyPr>
           <a:lstStyle/>
@@ -21265,6 +21283,7 @@
           <a:lstStyle/>
           <a:p>
             <a:pPr algn="ctr"/>
+            <a:endParaRPr/>
           </a:p>
         </p:txBody>
       </p:sp>
@@ -21285,7 +21304,7 @@
           <a:noFill/>
         </p:spPr>
         <p:txBody>
-          <a:bodyPr wrap="square" lIns="0" rIns="0" tIns="0" bIns="0" anchor="ctr">
+          <a:bodyPr wrap="square" lIns="0" tIns="0" rIns="0" bIns="0" anchor="ctr">
             <a:spAutoFit/>
           </a:bodyPr>
           <a:lstStyle/>
@@ -21348,6 +21367,7 @@
           <a:lstStyle/>
           <a:p>
             <a:pPr algn="ctr"/>
+            <a:endParaRPr/>
           </a:p>
         </p:txBody>
       </p:sp>
@@ -21368,7 +21388,7 @@
           <a:noFill/>
         </p:spPr>
         <p:txBody>
-          <a:bodyPr wrap="square" lIns="0" rIns="0" tIns="0" bIns="0" anchor="ctr">
+          <a:bodyPr wrap="square" lIns="0" tIns="0" rIns="0" bIns="0" anchor="ctr">
             <a:spAutoFit/>
           </a:bodyPr>
           <a:lstStyle/>
@@ -21431,6 +21451,7 @@
           <a:lstStyle/>
           <a:p>
             <a:pPr algn="ctr"/>
+            <a:endParaRPr/>
           </a:p>
         </p:txBody>
       </p:sp>
@@ -21451,7 +21472,7 @@
           <a:noFill/>
         </p:spPr>
         <p:txBody>
-          <a:bodyPr wrap="square" lIns="0" rIns="0" tIns="0" bIns="0" anchor="ctr">
+          <a:bodyPr wrap="square" lIns="0" tIns="0" rIns="0" bIns="0" anchor="ctr">
             <a:spAutoFit/>
           </a:bodyPr>
           <a:lstStyle/>
@@ -21514,6 +21535,7 @@
           <a:lstStyle/>
           <a:p>
             <a:pPr algn="ctr"/>
+            <a:endParaRPr/>
           </a:p>
         </p:txBody>
       </p:sp>
@@ -21534,7 +21556,7 @@
           <a:noFill/>
         </p:spPr>
         <p:txBody>
-          <a:bodyPr wrap="square" lIns="0" rIns="0" tIns="0" bIns="0" anchor="ctr">
+          <a:bodyPr wrap="square" lIns="0" tIns="0" rIns="0" bIns="0" anchor="ctr">
             <a:spAutoFit/>
           </a:bodyPr>
           <a:lstStyle/>
@@ -21615,7 +21637,6 @@
           <a:bodyPr/>
           <a:lstStyle/>
           <a:p>
-            <a:pPr/>
             <a:endParaRPr lang="ko-KR" altLang="en-US">
               <a:latin typeface="Pretendard"/>
               <a:ea typeface="Pretendard"/>
@@ -21781,7 +21802,6 @@
           <a:bodyPr/>
           <a:lstStyle/>
           <a:p>
-            <a:pPr/>
             <a:endParaRPr lang="ko-KR" altLang="en-US">
               <a:latin typeface="Pretendard"/>
               <a:ea typeface="Pretendard"/>
@@ -21818,7 +21838,6 @@
           <a:bodyPr/>
           <a:lstStyle/>
           <a:p>
-            <a:pPr/>
             <a:endParaRPr lang="ko-KR" altLang="en-US">
               <a:latin typeface="Pretendard"/>
               <a:ea typeface="Pretendard"/>
@@ -21984,7 +22003,6 @@
           <a:bodyPr/>
           <a:lstStyle/>
           <a:p>
-            <a:pPr/>
             <a:endParaRPr lang="ko-KR" altLang="en-US">
               <a:latin typeface="Pretendard"/>
               <a:ea typeface="Pretendard"/>
@@ -22021,7 +22039,6 @@
           <a:bodyPr/>
           <a:lstStyle/>
           <a:p>
-            <a:pPr/>
             <a:endParaRPr lang="ko-KR" altLang="en-US">
               <a:latin typeface="Pretendard"/>
               <a:ea typeface="Pretendard"/>
@@ -22187,7 +22204,6 @@
           <a:bodyPr/>
           <a:lstStyle/>
           <a:p>
-            <a:pPr/>
             <a:endParaRPr lang="ko-KR" altLang="en-US">
               <a:latin typeface="Pretendard"/>
               <a:ea typeface="Pretendard"/>
@@ -22224,7 +22240,6 @@
           <a:bodyPr/>
           <a:lstStyle/>
           <a:p>
-            <a:pPr/>
             <a:endParaRPr lang="ko-KR" altLang="en-US">
               <a:latin typeface="Pretendard"/>
               <a:ea typeface="Pretendard"/>
@@ -22390,7 +22405,6 @@
           <a:bodyPr/>
           <a:lstStyle/>
           <a:p>
-            <a:pPr/>
             <a:endParaRPr lang="ko-KR" altLang="en-US">
               <a:latin typeface="Pretendard"/>
               <a:ea typeface="Pretendard"/>
@@ -22427,7 +22441,6 @@
           <a:bodyPr/>
           <a:lstStyle/>
           <a:p>
-            <a:pPr/>
             <a:endParaRPr lang="ko-KR" altLang="en-US">
               <a:latin typeface="Pretendard"/>
               <a:ea typeface="Pretendard"/>
@@ -22593,7 +22606,6 @@
           <a:bodyPr/>
           <a:lstStyle/>
           <a:p>
-            <a:pPr/>
             <a:endParaRPr lang="ko-KR" altLang="en-US">
               <a:latin typeface="Pretendard"/>
               <a:ea typeface="Pretendard"/>
@@ -22630,7 +22642,6 @@
           <a:bodyPr/>
           <a:lstStyle/>
           <a:p>
-            <a:pPr/>
             <a:endParaRPr lang="ko-KR" altLang="en-US">
               <a:latin typeface="Pretendard"/>
               <a:ea typeface="Pretendard"/>
@@ -22796,7 +22807,6 @@
           <a:bodyPr/>
           <a:lstStyle/>
           <a:p>
-            <a:pPr/>
             <a:endParaRPr lang="ko-KR" altLang="en-US">
               <a:latin typeface="Pretendard"/>
               <a:ea typeface="Pretendard"/>
@@ -22833,7 +22843,6 @@
           <a:bodyPr/>
           <a:lstStyle/>
           <a:p>
-            <a:pPr/>
             <a:endParaRPr lang="ko-KR" altLang="en-US">
               <a:latin typeface="Pretendard"/>
               <a:ea typeface="Pretendard"/>
@@ -22999,7 +23008,6 @@
           <a:bodyPr/>
           <a:lstStyle/>
           <a:p>
-            <a:pPr/>
             <a:endParaRPr lang="ko-KR" altLang="en-US">
               <a:latin typeface="Pretendard"/>
               <a:ea typeface="Pretendard"/>
@@ -23036,7 +23044,6 @@
           <a:bodyPr/>
           <a:lstStyle/>
           <a:p>
-            <a:pPr/>
             <a:endParaRPr lang="ko-KR" altLang="en-US">
               <a:latin typeface="Pretendard"/>
               <a:ea typeface="Pretendard"/>
@@ -23363,7 +23370,7 @@
           <a:noFill/>
         </p:spPr>
         <p:txBody>
-          <a:bodyPr wrap="none" lIns="0" rIns="0" tIns="0" bIns="0">
+          <a:bodyPr wrap="none" lIns="0" tIns="0" rIns="0" bIns="0">
             <a:spAutoFit/>
           </a:bodyPr>
           <a:lstStyle/>
@@ -23444,7 +23451,6 @@
           <a:bodyPr/>
           <a:lstStyle/>
           <a:p>
-            <a:pPr/>
             <a:endParaRPr lang="ko-KR" altLang="en-US">
               <a:latin typeface="Pretendard"/>
               <a:ea typeface="Pretendard"/>
@@ -23610,7 +23616,6 @@
           <a:bodyPr/>
           <a:lstStyle/>
           <a:p>
-            <a:pPr/>
             <a:endParaRPr lang="ko-KR" altLang="en-US">
               <a:latin typeface="Pretendard"/>
               <a:ea typeface="Pretendard"/>
@@ -23805,7 +23810,6 @@
           <a:bodyPr/>
           <a:lstStyle/>
           <a:p>
-            <a:pPr/>
             <a:endParaRPr lang="ko-KR" altLang="en-US">
               <a:latin typeface="Pretendard"/>
               <a:ea typeface="Pretendard"/>
@@ -23885,7 +23889,6 @@
           <a:bodyPr/>
           <a:lstStyle/>
           <a:p>
-            <a:pPr/>
             <a:endParaRPr lang="ko-KR" altLang="en-US">
               <a:latin typeface="Pretendard"/>
               <a:ea typeface="Pretendard"/>
@@ -24051,7 +24054,6 @@
           <a:bodyPr/>
           <a:lstStyle/>
           <a:p>
-            <a:pPr/>
             <a:endParaRPr lang="ko-KR" altLang="en-US">
               <a:latin typeface="Pretendard"/>
               <a:ea typeface="Pretendard"/>
@@ -24217,7 +24219,6 @@
           <a:bodyPr/>
           <a:lstStyle/>
           <a:p>
-            <a:pPr/>
             <a:endParaRPr lang="ko-KR" altLang="en-US">
               <a:latin typeface="Pretendard"/>
               <a:ea typeface="Pretendard"/>
@@ -24383,7 +24384,6 @@
           <a:bodyPr/>
           <a:lstStyle/>
           <a:p>
-            <a:pPr/>
             <a:endParaRPr lang="ko-KR" altLang="en-US">
               <a:latin typeface="Pretendard"/>
               <a:ea typeface="Pretendard"/>
@@ -24549,7 +24549,6 @@
           <a:bodyPr/>
           <a:lstStyle/>
           <a:p>
-            <a:pPr/>
             <a:endParaRPr lang="ko-KR" altLang="en-US">
               <a:latin typeface="Pretendard"/>
               <a:ea typeface="Pretendard"/>
@@ -24715,7 +24714,6 @@
           <a:bodyPr/>
           <a:lstStyle/>
           <a:p>
-            <a:pPr/>
             <a:endParaRPr lang="ko-KR" altLang="en-US">
               <a:latin typeface="Pretendard"/>
               <a:ea typeface="Pretendard"/>
@@ -24956,7 +24954,7 @@
           <a:noFill/>
         </p:spPr>
         <p:txBody>
-          <a:bodyPr wrap="none" lIns="0" rIns="0" tIns="0" bIns="0">
+          <a:bodyPr wrap="none" lIns="0" tIns="0" rIns="0" bIns="0">
             <a:spAutoFit/>
           </a:bodyPr>
           <a:lstStyle/>
@@ -25037,7 +25035,6 @@
           <a:bodyPr/>
           <a:lstStyle/>
           <a:p>
-            <a:pPr/>
             <a:endParaRPr lang="ko-KR" altLang="en-US">
               <a:latin typeface="Pretendard"/>
               <a:ea typeface="Pretendard"/>
@@ -25332,7 +25329,6 @@
           <a:bodyPr/>
           <a:lstStyle/>
           <a:p>
-            <a:pPr/>
             <a:endParaRPr lang="ko-KR" altLang="en-US">
               <a:latin typeface="Pretendard"/>
               <a:ea typeface="Pretendard"/>
@@ -25455,7 +25451,6 @@
           <a:bodyPr/>
           <a:lstStyle/>
           <a:p>
-            <a:pPr/>
             <a:endParaRPr lang="ko-KR" altLang="en-US">
               <a:latin typeface="Pretendard"/>
               <a:ea typeface="Pretendard"/>
@@ -25578,7 +25573,6 @@
           <a:bodyPr/>
           <a:lstStyle/>
           <a:p>
-            <a:pPr/>
             <a:endParaRPr lang="ko-KR" altLang="en-US">
               <a:latin typeface="Pretendard"/>
               <a:ea typeface="Pretendard"/>
@@ -25701,7 +25695,6 @@
           <a:bodyPr/>
           <a:lstStyle/>
           <a:p>
-            <a:pPr/>
             <a:endParaRPr lang="ko-KR" altLang="en-US">
               <a:latin typeface="Pretendard"/>
               <a:ea typeface="Pretendard"/>
@@ -25824,7 +25817,6 @@
           <a:bodyPr/>
           <a:lstStyle/>
           <a:p>
-            <a:pPr/>
             <a:endParaRPr lang="ko-KR" altLang="en-US">
               <a:latin typeface="Pretendard"/>
               <a:ea typeface="Pretendard"/>
@@ -26022,7 +26014,7 @@
           <a:noFill/>
         </p:spPr>
         <p:txBody>
-          <a:bodyPr wrap="none" lIns="0" rIns="0" tIns="0" bIns="0">
+          <a:bodyPr wrap="none" lIns="0" tIns="0" rIns="0" bIns="0">
             <a:spAutoFit/>
           </a:bodyPr>
           <a:lstStyle/>
@@ -26103,7 +26095,6 @@
           <a:bodyPr/>
           <a:lstStyle/>
           <a:p>
-            <a:pPr/>
             <a:endParaRPr lang="ko-KR" altLang="en-US">
               <a:latin typeface="Pretendard"/>
               <a:ea typeface="Pretendard"/>
@@ -26269,7 +26260,6 @@
           <a:bodyPr/>
           <a:lstStyle/>
           <a:p>
-            <a:pPr/>
             <a:endParaRPr lang="ko-KR" altLang="en-US">
               <a:latin typeface="Pretendard"/>
               <a:ea typeface="Pretendard"/>
@@ -26306,7 +26296,6 @@
           <a:bodyPr/>
           <a:lstStyle/>
           <a:p>
-            <a:pPr/>
             <a:endParaRPr lang="ko-KR" altLang="en-US">
               <a:latin typeface="Pretendard"/>
               <a:ea typeface="Pretendard"/>
@@ -26558,7 +26547,6 @@
           <a:bodyPr/>
           <a:lstStyle/>
           <a:p>
-            <a:pPr/>
             <a:endParaRPr lang="ko-KR" altLang="en-US">
               <a:latin typeface="Pretendard"/>
               <a:ea typeface="Pretendard"/>
@@ -26595,7 +26583,6 @@
           <a:bodyPr/>
           <a:lstStyle/>
           <a:p>
-            <a:pPr/>
             <a:endParaRPr lang="ko-KR" altLang="en-US">
               <a:latin typeface="Pretendard"/>
               <a:ea typeface="Pretendard"/>
@@ -26847,7 +26834,6 @@
           <a:bodyPr/>
           <a:lstStyle/>
           <a:p>
-            <a:pPr/>
             <a:endParaRPr lang="ko-KR" altLang="en-US">
               <a:latin typeface="Pretendard"/>
               <a:ea typeface="Pretendard"/>
@@ -26884,7 +26870,6 @@
           <a:bodyPr/>
           <a:lstStyle/>
           <a:p>
-            <a:pPr/>
             <a:endParaRPr lang="ko-KR" altLang="en-US">
               <a:latin typeface="Pretendard"/>
               <a:ea typeface="Pretendard"/>
@@ -27136,7 +27121,6 @@
           <a:bodyPr/>
           <a:lstStyle/>
           <a:p>
-            <a:pPr/>
             <a:endParaRPr lang="ko-KR" altLang="en-US">
               <a:latin typeface="Pretendard"/>
               <a:ea typeface="Pretendard"/>
@@ -27291,7 +27275,7 @@
           <a:noFill/>
         </p:spPr>
         <p:txBody>
-          <a:bodyPr wrap="none" lIns="0" rIns="0" tIns="0" bIns="0">
+          <a:bodyPr wrap="none" lIns="0" tIns="0" rIns="0" bIns="0">
             <a:spAutoFit/>
           </a:bodyPr>
           <a:lstStyle/>
@@ -27354,6 +27338,7 @@
           <a:lstStyle/>
           <a:p>
             <a:pPr algn="ctr"/>
+            <a:endParaRPr/>
           </a:p>
         </p:txBody>
       </p:sp>
@@ -27400,6 +27385,7 @@
           <a:lstStyle/>
           <a:p>
             <a:pPr algn="ctr"/>
+            <a:endParaRPr/>
           </a:p>
         </p:txBody>
       </p:sp>
@@ -27420,7 +27406,7 @@
           <a:noFill/>
         </p:spPr>
         <p:txBody>
-          <a:bodyPr wrap="square" lIns="0" rIns="0" tIns="0" bIns="0" anchor="ctr">
+          <a:bodyPr wrap="square" lIns="0" tIns="0" rIns="0" bIns="0" anchor="ctr">
             <a:spAutoFit/>
           </a:bodyPr>
           <a:lstStyle/>
@@ -27457,7 +27443,7 @@
           <a:noFill/>
         </p:spPr>
         <p:txBody>
-          <a:bodyPr wrap="square" lIns="0" rIns="0" tIns="0" bIns="0" anchor="ctr">
+          <a:bodyPr wrap="square" lIns="0" tIns="0" rIns="0" bIns="0" anchor="ctr">
             <a:spAutoFit/>
           </a:bodyPr>
           <a:lstStyle/>
@@ -27520,6 +27506,7 @@
           <a:lstStyle/>
           <a:p>
             <a:pPr algn="ctr"/>
+            <a:endParaRPr/>
           </a:p>
         </p:txBody>
       </p:sp>
@@ -27566,6 +27553,7 @@
           <a:lstStyle/>
           <a:p>
             <a:pPr algn="ctr"/>
+            <a:endParaRPr/>
           </a:p>
         </p:txBody>
       </p:sp>
@@ -27586,7 +27574,7 @@
           <a:noFill/>
         </p:spPr>
         <p:txBody>
-          <a:bodyPr wrap="square" lIns="0" rIns="0" tIns="0" bIns="0" anchor="ctr">
+          <a:bodyPr wrap="square" lIns="0" tIns="0" rIns="0" bIns="0" anchor="ctr">
             <a:spAutoFit/>
           </a:bodyPr>
           <a:lstStyle/>
@@ -27623,7 +27611,7 @@
           <a:noFill/>
         </p:spPr>
         <p:txBody>
-          <a:bodyPr wrap="square" lIns="0" rIns="0" tIns="0" bIns="0" anchor="ctr">
+          <a:bodyPr wrap="square" lIns="0" tIns="0" rIns="0" bIns="0" anchor="ctr">
             <a:spAutoFit/>
           </a:bodyPr>
           <a:lstStyle/>
@@ -27686,6 +27674,7 @@
           <a:lstStyle/>
           <a:p>
             <a:pPr algn="ctr"/>
+            <a:endParaRPr/>
           </a:p>
         </p:txBody>
       </p:sp>
@@ -27732,6 +27721,7 @@
           <a:lstStyle/>
           <a:p>
             <a:pPr algn="ctr"/>
+            <a:endParaRPr/>
           </a:p>
         </p:txBody>
       </p:sp>
@@ -27752,7 +27742,7 @@
           <a:noFill/>
         </p:spPr>
         <p:txBody>
-          <a:bodyPr wrap="square" lIns="0" rIns="0" tIns="0" bIns="0" anchor="ctr">
+          <a:bodyPr wrap="square" lIns="0" tIns="0" rIns="0" bIns="0" anchor="ctr">
             <a:spAutoFit/>
           </a:bodyPr>
           <a:lstStyle/>
@@ -27789,7 +27779,7 @@
           <a:noFill/>
         </p:spPr>
         <p:txBody>
-          <a:bodyPr wrap="square" lIns="0" rIns="0" tIns="0" bIns="0" anchor="ctr">
+          <a:bodyPr wrap="square" lIns="0" tIns="0" rIns="0" bIns="0" anchor="ctr">
             <a:spAutoFit/>
           </a:bodyPr>
           <a:lstStyle/>
@@ -27852,6 +27842,7 @@
           <a:lstStyle/>
           <a:p>
             <a:pPr algn="ctr"/>
+            <a:endParaRPr/>
           </a:p>
         </p:txBody>
       </p:sp>
@@ -27898,6 +27889,7 @@
           <a:lstStyle/>
           <a:p>
             <a:pPr algn="ctr"/>
+            <a:endParaRPr/>
           </a:p>
         </p:txBody>
       </p:sp>
@@ -27918,7 +27910,7 @@
           <a:noFill/>
         </p:spPr>
         <p:txBody>
-          <a:bodyPr wrap="square" lIns="0" rIns="0" tIns="0" bIns="0" anchor="ctr">
+          <a:bodyPr wrap="square" lIns="0" tIns="0" rIns="0" bIns="0" anchor="ctr">
             <a:spAutoFit/>
           </a:bodyPr>
           <a:lstStyle/>
@@ -27955,7 +27947,7 @@
           <a:noFill/>
         </p:spPr>
         <p:txBody>
-          <a:bodyPr wrap="square" lIns="0" rIns="0" tIns="0" bIns="0" anchor="ctr">
+          <a:bodyPr wrap="square" lIns="0" tIns="0" rIns="0" bIns="0" anchor="ctr">
             <a:spAutoFit/>
           </a:bodyPr>
           <a:lstStyle/>
@@ -28018,6 +28010,7 @@
           <a:lstStyle/>
           <a:p>
             <a:pPr algn="ctr"/>
+            <a:endParaRPr/>
           </a:p>
         </p:txBody>
       </p:sp>
@@ -28064,6 +28057,7 @@
           <a:lstStyle/>
           <a:p>
             <a:pPr algn="ctr"/>
+            <a:endParaRPr/>
           </a:p>
         </p:txBody>
       </p:sp>
@@ -28084,7 +28078,7 @@
           <a:noFill/>
         </p:spPr>
         <p:txBody>
-          <a:bodyPr wrap="square" lIns="0" rIns="0" tIns="0" bIns="0" anchor="ctr">
+          <a:bodyPr wrap="square" lIns="0" tIns="0" rIns="0" bIns="0" anchor="ctr">
             <a:spAutoFit/>
           </a:bodyPr>
           <a:lstStyle/>
@@ -28121,7 +28115,7 @@
           <a:noFill/>
         </p:spPr>
         <p:txBody>
-          <a:bodyPr wrap="square" lIns="0" rIns="0" tIns="0" bIns="0" anchor="ctr">
+          <a:bodyPr wrap="square" lIns="0" tIns="0" rIns="0" bIns="0" anchor="ctr">
             <a:spAutoFit/>
           </a:bodyPr>
           <a:lstStyle/>
@@ -28184,6 +28178,7 @@
           <a:lstStyle/>
           <a:p>
             <a:pPr algn="ctr"/>
+            <a:endParaRPr/>
           </a:p>
         </p:txBody>
       </p:sp>
@@ -28230,6 +28225,7 @@
           <a:lstStyle/>
           <a:p>
             <a:pPr algn="ctr"/>
+            <a:endParaRPr/>
           </a:p>
         </p:txBody>
       </p:sp>
@@ -28250,7 +28246,7 @@
           <a:noFill/>
         </p:spPr>
         <p:txBody>
-          <a:bodyPr wrap="square" lIns="0" rIns="0" tIns="0" bIns="0" anchor="ctr">
+          <a:bodyPr wrap="square" lIns="0" tIns="0" rIns="0" bIns="0" anchor="ctr">
             <a:spAutoFit/>
           </a:bodyPr>
           <a:lstStyle/>
@@ -28287,7 +28283,7 @@
           <a:noFill/>
         </p:spPr>
         <p:txBody>
-          <a:bodyPr wrap="square" lIns="0" rIns="0" tIns="0" bIns="0" anchor="ctr">
+          <a:bodyPr wrap="square" lIns="0" tIns="0" rIns="0" bIns="0" anchor="ctr">
             <a:spAutoFit/>
           </a:bodyPr>
           <a:lstStyle/>
@@ -28368,7 +28364,6 @@
           <a:bodyPr/>
           <a:lstStyle/>
           <a:p>
-            <a:pPr/>
             <a:endParaRPr lang="ko-KR" altLang="en-US">
               <a:latin typeface="Pretendard"/>
               <a:ea typeface="Pretendard"/>
@@ -29985,7 +29980,7 @@
           <a:noFill/>
         </p:spPr>
         <p:txBody>
-          <a:bodyPr wrap="none" lIns="0" rIns="0" tIns="0" bIns="0">
+          <a:bodyPr wrap="none" lIns="0" tIns="0" rIns="0" bIns="0">
             <a:spAutoFit/>
           </a:bodyPr>
           <a:lstStyle/>
@@ -30066,7 +30061,6 @@
           <a:bodyPr/>
           <a:lstStyle/>
           <a:p>
-            <a:pPr/>
             <a:endParaRPr lang="ko-KR" altLang="en-US">
               <a:latin typeface="Pretendard"/>
               <a:ea typeface="Pretendard"/>
@@ -30307,7 +30301,7 @@
           <a:noFill/>
         </p:spPr>
         <p:txBody>
-          <a:bodyPr wrap="none" lIns="0" rIns="0" tIns="0" bIns="0">
+          <a:bodyPr wrap="none" lIns="0" tIns="0" rIns="0" bIns="0">
             <a:spAutoFit/>
           </a:bodyPr>
           <a:lstStyle/>
@@ -30344,7 +30338,7 @@
           <a:noFill/>
         </p:spPr>
         <p:txBody>
-          <a:bodyPr wrap="square" lIns="0" rIns="0" tIns="0" bIns="0" anchor="ctr">
+          <a:bodyPr wrap="square" lIns="0" tIns="0" rIns="0" bIns="0" anchor="ctr">
             <a:spAutoFit/>
           </a:bodyPr>
           <a:lstStyle/>
@@ -30381,7 +30375,7 @@
           <a:noFill/>
         </p:spPr>
         <p:txBody>
-          <a:bodyPr wrap="square" lIns="0" rIns="0" tIns="0" bIns="0" anchor="ctr">
+          <a:bodyPr wrap="square" lIns="0" tIns="0" rIns="0" bIns="0" anchor="ctr">
             <a:spAutoFit/>
           </a:bodyPr>
           <a:lstStyle/>
@@ -30481,6 +30475,7 @@
           <a:lstStyle/>
           <a:p>
             <a:pPr algn="ctr"/>
+            <a:endParaRPr/>
           </a:p>
         </p:txBody>
       </p:sp>
@@ -30501,7 +30496,7 @@
           <a:noFill/>
         </p:spPr>
         <p:txBody>
-          <a:bodyPr wrap="square" lIns="0" rIns="0" tIns="0" bIns="0" anchor="ctr">
+          <a:bodyPr wrap="square" lIns="0" tIns="0" rIns="0" bIns="0" anchor="ctr">
             <a:spAutoFit/>
           </a:bodyPr>
           <a:lstStyle/>
@@ -30562,6 +30557,7 @@
           <a:lstStyle/>
           <a:p>
             <a:pPr algn="ctr"/>
+            <a:endParaRPr/>
           </a:p>
         </p:txBody>
       </p:sp>
@@ -30582,7 +30578,7 @@
           <a:noFill/>
         </p:spPr>
         <p:txBody>
-          <a:bodyPr wrap="square" lIns="0" rIns="0" tIns="0" bIns="0" anchor="ctr">
+          <a:bodyPr wrap="square" lIns="0" tIns="0" rIns="0" bIns="0" anchor="ctr">
             <a:spAutoFit/>
           </a:bodyPr>
           <a:lstStyle/>
@@ -30647,6 +30643,7 @@
           <a:lstStyle/>
           <a:p>
             <a:pPr algn="ctr"/>
+            <a:endParaRPr/>
           </a:p>
         </p:txBody>
       </p:sp>
@@ -30667,7 +30664,7 @@
           <a:noFill/>
         </p:spPr>
         <p:txBody>
-          <a:bodyPr wrap="square" lIns="0" rIns="0" tIns="0" bIns="0" anchor="ctr">
+          <a:bodyPr wrap="square" lIns="0" tIns="0" rIns="0" bIns="0" anchor="ctr">
             <a:spAutoFit/>
           </a:bodyPr>
           <a:lstStyle/>
@@ -30728,6 +30725,7 @@
           <a:lstStyle/>
           <a:p>
             <a:pPr algn="ctr"/>
+            <a:endParaRPr/>
           </a:p>
         </p:txBody>
       </p:sp>
@@ -30748,7 +30746,7 @@
           <a:noFill/>
         </p:spPr>
         <p:txBody>
-          <a:bodyPr wrap="square" lIns="0" rIns="0" tIns="0" bIns="0" anchor="ctr">
+          <a:bodyPr wrap="square" lIns="0" tIns="0" rIns="0" bIns="0" anchor="ctr">
             <a:spAutoFit/>
           </a:bodyPr>
           <a:lstStyle/>
@@ -30813,6 +30811,7 @@
           <a:lstStyle/>
           <a:p>
             <a:pPr algn="ctr"/>
+            <a:endParaRPr/>
           </a:p>
         </p:txBody>
       </p:sp>
@@ -30833,7 +30832,7 @@
           <a:noFill/>
         </p:spPr>
         <p:txBody>
-          <a:bodyPr wrap="square" lIns="0" rIns="0" tIns="0" bIns="0" anchor="ctr">
+          <a:bodyPr wrap="square" lIns="0" tIns="0" rIns="0" bIns="0" anchor="ctr">
             <a:spAutoFit/>
           </a:bodyPr>
           <a:lstStyle/>
@@ -30894,6 +30893,7 @@
           <a:lstStyle/>
           <a:p>
             <a:pPr algn="ctr"/>
+            <a:endParaRPr/>
           </a:p>
         </p:txBody>
       </p:sp>
@@ -30914,7 +30914,7 @@
           <a:noFill/>
         </p:spPr>
         <p:txBody>
-          <a:bodyPr wrap="square" lIns="0" rIns="0" tIns="0" bIns="0" anchor="ctr">
+          <a:bodyPr wrap="square" lIns="0" tIns="0" rIns="0" bIns="0" anchor="ctr">
             <a:spAutoFit/>
           </a:bodyPr>
           <a:lstStyle/>
@@ -30979,6 +30979,7 @@
           <a:lstStyle/>
           <a:p>
             <a:pPr algn="ctr"/>
+            <a:endParaRPr/>
           </a:p>
         </p:txBody>
       </p:sp>
@@ -30999,7 +31000,7 @@
           <a:noFill/>
         </p:spPr>
         <p:txBody>
-          <a:bodyPr wrap="square" lIns="0" rIns="0" tIns="0" bIns="0" anchor="ctr">
+          <a:bodyPr wrap="square" lIns="0" tIns="0" rIns="0" bIns="0" anchor="ctr">
             <a:spAutoFit/>
           </a:bodyPr>
           <a:lstStyle/>
@@ -31036,7 +31037,7 @@
           <a:noFill/>
         </p:spPr>
         <p:txBody>
-          <a:bodyPr wrap="square" lIns="0" rIns="0" tIns="0" bIns="0" anchor="ctr">
+          <a:bodyPr wrap="square" lIns="0" tIns="0" rIns="0" bIns="0" anchor="ctr">
             <a:spAutoFit/>
           </a:bodyPr>
           <a:lstStyle/>
@@ -31136,6 +31137,7 @@
           <a:lstStyle/>
           <a:p>
             <a:pPr algn="ctr"/>
+            <a:endParaRPr/>
           </a:p>
         </p:txBody>
       </p:sp>
@@ -31156,7 +31158,7 @@
           <a:noFill/>
         </p:spPr>
         <p:txBody>
-          <a:bodyPr wrap="square" lIns="0" rIns="0" tIns="0" bIns="0" anchor="ctr">
+          <a:bodyPr wrap="square" lIns="0" tIns="0" rIns="0" bIns="0" anchor="ctr">
             <a:spAutoFit/>
           </a:bodyPr>
           <a:lstStyle/>
@@ -31217,6 +31219,7 @@
           <a:lstStyle/>
           <a:p>
             <a:pPr algn="ctr"/>
+            <a:endParaRPr/>
           </a:p>
         </p:txBody>
       </p:sp>
@@ -31237,7 +31240,7 @@
           <a:noFill/>
         </p:spPr>
         <p:txBody>
-          <a:bodyPr wrap="square" lIns="0" rIns="0" tIns="0" bIns="0" anchor="ctr">
+          <a:bodyPr wrap="square" lIns="0" tIns="0" rIns="0" bIns="0" anchor="ctr">
             <a:spAutoFit/>
           </a:bodyPr>
           <a:lstStyle/>
@@ -31302,6 +31305,7 @@
           <a:lstStyle/>
           <a:p>
             <a:pPr algn="ctr"/>
+            <a:endParaRPr/>
           </a:p>
         </p:txBody>
       </p:sp>
@@ -31322,7 +31326,7 @@
           <a:noFill/>
         </p:spPr>
         <p:txBody>
-          <a:bodyPr wrap="square" lIns="0" rIns="0" tIns="0" bIns="0" anchor="ctr">
+          <a:bodyPr wrap="square" lIns="0" tIns="0" rIns="0" bIns="0" anchor="ctr">
             <a:spAutoFit/>
           </a:bodyPr>
           <a:lstStyle/>
@@ -31383,6 +31387,7 @@
           <a:lstStyle/>
           <a:p>
             <a:pPr algn="ctr"/>
+            <a:endParaRPr/>
           </a:p>
         </p:txBody>
       </p:sp>
@@ -31403,7 +31408,7 @@
           <a:noFill/>
         </p:spPr>
         <p:txBody>
-          <a:bodyPr wrap="square" lIns="0" rIns="0" tIns="0" bIns="0" anchor="ctr">
+          <a:bodyPr wrap="square" lIns="0" tIns="0" rIns="0" bIns="0" anchor="ctr">
             <a:spAutoFit/>
           </a:bodyPr>
           <a:lstStyle/>
@@ -31468,6 +31473,7 @@
           <a:lstStyle/>
           <a:p>
             <a:pPr algn="ctr"/>
+            <a:endParaRPr/>
           </a:p>
         </p:txBody>
       </p:sp>
@@ -31488,7 +31494,7 @@
           <a:noFill/>
         </p:spPr>
         <p:txBody>
-          <a:bodyPr wrap="square" lIns="0" rIns="0" tIns="0" bIns="0" anchor="ctr">
+          <a:bodyPr wrap="square" lIns="0" tIns="0" rIns="0" bIns="0" anchor="ctr">
             <a:spAutoFit/>
           </a:bodyPr>
           <a:lstStyle/>
@@ -31549,6 +31555,7 @@
           <a:lstStyle/>
           <a:p>
             <a:pPr algn="ctr"/>
+            <a:endParaRPr/>
           </a:p>
         </p:txBody>
       </p:sp>
@@ -31569,7 +31576,7 @@
           <a:noFill/>
         </p:spPr>
         <p:txBody>
-          <a:bodyPr wrap="square" lIns="0" rIns="0" tIns="0" bIns="0" anchor="ctr">
+          <a:bodyPr wrap="square" lIns="0" tIns="0" rIns="0" bIns="0" anchor="ctr">
             <a:spAutoFit/>
           </a:bodyPr>
           <a:lstStyle/>
@@ -31634,6 +31641,7 @@
           <a:lstStyle/>
           <a:p>
             <a:pPr algn="ctr"/>
+            <a:endParaRPr/>
           </a:p>
         </p:txBody>
       </p:sp>
@@ -31654,7 +31662,7 @@
           <a:noFill/>
         </p:spPr>
         <p:txBody>
-          <a:bodyPr wrap="square" lIns="0" rIns="0" tIns="0" bIns="0" anchor="ctr">
+          <a:bodyPr wrap="square" lIns="0" tIns="0" rIns="0" bIns="0" anchor="ctr">
             <a:spAutoFit/>
           </a:bodyPr>
           <a:lstStyle/>
@@ -31691,7 +31699,7 @@
           <a:noFill/>
         </p:spPr>
         <p:txBody>
-          <a:bodyPr wrap="square" lIns="0" rIns="0" tIns="0" bIns="0" anchor="ctr">
+          <a:bodyPr wrap="square" lIns="0" tIns="0" rIns="0" bIns="0" anchor="ctr">
             <a:spAutoFit/>
           </a:bodyPr>
           <a:lstStyle/>
@@ -31728,7 +31736,7 @@
           <a:noFill/>
         </p:spPr>
         <p:txBody>
-          <a:bodyPr wrap="square" lIns="0" rIns="0" tIns="0" bIns="0" anchor="ctr">
+          <a:bodyPr wrap="square" lIns="0" tIns="0" rIns="0" bIns="0" anchor="ctr">
             <a:spAutoFit/>
           </a:bodyPr>
           <a:lstStyle/>
@@ -31791,6 +31799,7 @@
           <a:lstStyle/>
           <a:p>
             <a:pPr algn="ctr"/>
+            <a:endParaRPr/>
           </a:p>
         </p:txBody>
       </p:sp>
@@ -32053,6 +32062,7 @@
           <a:lstStyle/>
           <a:p>
             <a:pPr algn="ctr"/>
+            <a:endParaRPr/>
           </a:p>
         </p:txBody>
       </p:sp>
@@ -32073,7 +32083,7 @@
           <a:noFill/>
         </p:spPr>
         <p:txBody>
-          <a:bodyPr wrap="square" lIns="0" rIns="0" tIns="0" bIns="0" anchor="ctr">
+          <a:bodyPr wrap="square" lIns="0" tIns="0" rIns="0" bIns="0" anchor="ctr">
             <a:spAutoFit/>
           </a:bodyPr>
           <a:lstStyle/>
@@ -32136,6 +32146,7 @@
           <a:lstStyle/>
           <a:p>
             <a:pPr algn="ctr"/>
+            <a:endParaRPr/>
           </a:p>
         </p:txBody>
       </p:sp>
@@ -32156,7 +32167,7 @@
           <a:noFill/>
         </p:spPr>
         <p:txBody>
-          <a:bodyPr wrap="square" lIns="0" rIns="0" tIns="0" bIns="0" anchor="ctr">
+          <a:bodyPr wrap="square" lIns="0" tIns="0" rIns="0" bIns="0" anchor="ctr">
             <a:spAutoFit/>
           </a:bodyPr>
           <a:lstStyle/>
@@ -32219,6 +32230,7 @@
           <a:lstStyle/>
           <a:p>
             <a:pPr algn="ctr"/>
+            <a:endParaRPr/>
           </a:p>
         </p:txBody>
       </p:sp>
@@ -32239,7 +32251,7 @@
           <a:noFill/>
         </p:spPr>
         <p:txBody>
-          <a:bodyPr wrap="square" lIns="0" rIns="0" tIns="0" bIns="0" anchor="ctr">
+          <a:bodyPr wrap="square" lIns="0" tIns="0" rIns="0" bIns="0" anchor="ctr">
             <a:spAutoFit/>
           </a:bodyPr>
           <a:lstStyle/>
@@ -32302,6 +32314,7 @@
           <a:lstStyle/>
           <a:p>
             <a:pPr algn="ctr"/>
+            <a:endParaRPr/>
           </a:p>
         </p:txBody>
       </p:sp>
@@ -32322,7 +32335,7 @@
           <a:noFill/>
         </p:spPr>
         <p:txBody>
-          <a:bodyPr wrap="square" lIns="0" rIns="0" tIns="0" bIns="0" anchor="ctr">
+          <a:bodyPr wrap="square" lIns="0" tIns="0" rIns="0" bIns="0" anchor="ctr">
             <a:spAutoFit/>
           </a:bodyPr>
           <a:lstStyle/>
@@ -32385,6 +32398,7 @@
           <a:lstStyle/>
           <a:p>
             <a:pPr algn="ctr"/>
+            <a:endParaRPr/>
           </a:p>
         </p:txBody>
       </p:sp>
@@ -32405,7 +32419,7 @@
           <a:noFill/>
         </p:spPr>
         <p:txBody>
-          <a:bodyPr wrap="square" lIns="0" rIns="0" tIns="0" bIns="0" anchor="ctr">
+          <a:bodyPr wrap="square" lIns="0" tIns="0" rIns="0" bIns="0" anchor="ctr">
             <a:spAutoFit/>
           </a:bodyPr>
           <a:lstStyle/>
@@ -32468,6 +32482,7 @@
           <a:lstStyle/>
           <a:p>
             <a:pPr algn="ctr"/>
+            <a:endParaRPr/>
           </a:p>
         </p:txBody>
       </p:sp>
@@ -32488,7 +32503,7 @@
           <a:noFill/>
         </p:spPr>
         <p:txBody>
-          <a:bodyPr wrap="square" lIns="0" rIns="0" tIns="0" bIns="0" anchor="ctr">
+          <a:bodyPr wrap="square" lIns="0" tIns="0" rIns="0" bIns="0" anchor="ctr">
             <a:spAutoFit/>
           </a:bodyPr>
           <a:lstStyle/>
@@ -32551,6 +32566,7 @@
           <a:lstStyle/>
           <a:p>
             <a:pPr algn="ctr"/>
+            <a:endParaRPr/>
           </a:p>
         </p:txBody>
       </p:sp>
@@ -32571,7 +32587,7 @@
           <a:noFill/>
         </p:spPr>
         <p:txBody>
-          <a:bodyPr wrap="square" lIns="0" rIns="0" tIns="0" bIns="0" anchor="ctr">
+          <a:bodyPr wrap="square" lIns="0" tIns="0" rIns="0" bIns="0" anchor="ctr">
             <a:spAutoFit/>
           </a:bodyPr>
           <a:lstStyle/>
@@ -32634,6 +32650,7 @@
           <a:lstStyle/>
           <a:p>
             <a:pPr algn="ctr"/>
+            <a:endParaRPr/>
           </a:p>
         </p:txBody>
       </p:sp>
@@ -32654,7 +32671,7 @@
           <a:noFill/>
         </p:spPr>
         <p:txBody>
-          <a:bodyPr wrap="square" lIns="0" rIns="0" tIns="0" bIns="0" anchor="ctr">
+          <a:bodyPr wrap="square" lIns="0" tIns="0" rIns="0" bIns="0" anchor="ctr">
             <a:spAutoFit/>
           </a:bodyPr>
           <a:lstStyle/>
@@ -32715,6 +32732,7 @@
           <a:lstStyle/>
           <a:p>
             <a:pPr algn="ctr"/>
+            <a:endParaRPr/>
           </a:p>
         </p:txBody>
       </p:sp>
@@ -32735,7 +32753,7 @@
           <a:noFill/>
         </p:spPr>
         <p:txBody>
-          <a:bodyPr wrap="square" lIns="0" rIns="0" tIns="0" bIns="0" anchor="ctr">
+          <a:bodyPr wrap="square" lIns="0" tIns="0" rIns="0" bIns="0" anchor="ctr">
             <a:spAutoFit/>
           </a:bodyPr>
           <a:lstStyle/>
@@ -32796,6 +32814,7 @@
           <a:lstStyle/>
           <a:p>
             <a:pPr algn="ctr"/>
+            <a:endParaRPr/>
           </a:p>
         </p:txBody>
       </p:sp>
@@ -32816,7 +32835,7 @@
           <a:noFill/>
         </p:spPr>
         <p:txBody>
-          <a:bodyPr wrap="square" lIns="0" rIns="0" tIns="0" bIns="0" anchor="ctr">
+          <a:bodyPr wrap="square" lIns="0" tIns="0" rIns="0" bIns="0" anchor="ctr">
             <a:spAutoFit/>
           </a:bodyPr>
           <a:lstStyle/>
@@ -32853,7 +32872,7 @@
           <a:noFill/>
         </p:spPr>
         <p:txBody>
-          <a:bodyPr wrap="square" lIns="0" rIns="0" tIns="0" bIns="0" anchor="ctr">
+          <a:bodyPr wrap="square" lIns="0" tIns="0" rIns="0" bIns="0" anchor="ctr">
             <a:spAutoFit/>
           </a:bodyPr>
           <a:lstStyle/>
@@ -32890,7 +32909,7 @@
           <a:noFill/>
         </p:spPr>
         <p:txBody>
-          <a:bodyPr wrap="square" lIns="0" rIns="0" tIns="0" bIns="0" anchor="ctr">
+          <a:bodyPr wrap="square" lIns="0" tIns="0" rIns="0" bIns="0" anchor="ctr">
             <a:spAutoFit/>
           </a:bodyPr>
           <a:lstStyle/>
@@ -32927,7 +32946,7 @@
           <a:noFill/>
         </p:spPr>
         <p:txBody>
-          <a:bodyPr wrap="square" lIns="0" rIns="0" tIns="0" bIns="0" anchor="ctr">
+          <a:bodyPr wrap="square" lIns="0" tIns="0" rIns="0" bIns="0" anchor="ctr">
             <a:spAutoFit/>
           </a:bodyPr>
           <a:lstStyle/>
@@ -32964,7 +32983,7 @@
           <a:noFill/>
         </p:spPr>
         <p:txBody>
-          <a:bodyPr wrap="square" lIns="0" rIns="0" tIns="0" bIns="0" anchor="ctr">
+          <a:bodyPr wrap="square" lIns="0" tIns="0" rIns="0" bIns="0" anchor="ctr">
             <a:spAutoFit/>
           </a:bodyPr>
           <a:lstStyle/>
@@ -33001,7 +33020,7 @@
           <a:noFill/>
         </p:spPr>
         <p:txBody>
-          <a:bodyPr wrap="square" lIns="0" rIns="0" tIns="0" bIns="0" anchor="ctr">
+          <a:bodyPr wrap="square" lIns="0" tIns="0" rIns="0" bIns="0" anchor="ctr">
             <a:spAutoFit/>
           </a:bodyPr>
           <a:lstStyle/>
@@ -33038,7 +33057,7 @@
           <a:noFill/>
         </p:spPr>
         <p:txBody>
-          <a:bodyPr wrap="square" lIns="0" rIns="0" tIns="0" bIns="0" anchor="ctr">
+          <a:bodyPr wrap="square" lIns="0" tIns="0" rIns="0" bIns="0" anchor="ctr">
             <a:spAutoFit/>
           </a:bodyPr>
           <a:lstStyle/>
@@ -33075,7 +33094,7 @@
           <a:noFill/>
         </p:spPr>
         <p:txBody>
-          <a:bodyPr wrap="square" lIns="0" rIns="0" tIns="0" bIns="0" anchor="ctr">
+          <a:bodyPr wrap="square" lIns="0" tIns="0" rIns="0" bIns="0" anchor="ctr">
             <a:spAutoFit/>
           </a:bodyPr>
           <a:lstStyle/>
@@ -33112,7 +33131,7 @@
           <a:noFill/>
         </p:spPr>
         <p:txBody>
-          <a:bodyPr wrap="square" lIns="0" rIns="0" tIns="0" bIns="0" anchor="ctr">
+          <a:bodyPr wrap="square" lIns="0" tIns="0" rIns="0" bIns="0" anchor="ctr">
             <a:spAutoFit/>
           </a:bodyPr>
           <a:lstStyle/>
@@ -33149,7 +33168,7 @@
           <a:noFill/>
         </p:spPr>
         <p:txBody>
-          <a:bodyPr wrap="square" lIns="0" rIns="0" tIns="0" bIns="0" anchor="ctr">
+          <a:bodyPr wrap="square" lIns="0" tIns="0" rIns="0" bIns="0" anchor="ctr">
             <a:spAutoFit/>
           </a:bodyPr>
           <a:lstStyle/>
@@ -33186,7 +33205,7 @@
           <a:noFill/>
         </p:spPr>
         <p:txBody>
-          <a:bodyPr wrap="square" lIns="0" rIns="0" tIns="0" bIns="0" anchor="ctr">
+          <a:bodyPr wrap="square" lIns="0" tIns="0" rIns="0" bIns="0" anchor="ctr">
             <a:spAutoFit/>
           </a:bodyPr>
           <a:lstStyle/>
@@ -33223,7 +33242,7 @@
           <a:noFill/>
         </p:spPr>
         <p:txBody>
-          <a:bodyPr wrap="square" lIns="0" rIns="0" tIns="0" bIns="0" anchor="ctr">
+          <a:bodyPr wrap="square" lIns="0" tIns="0" rIns="0" bIns="0" anchor="ctr">
             <a:spAutoFit/>
           </a:bodyPr>
           <a:lstStyle/>
@@ -33260,7 +33279,7 @@
           <a:noFill/>
         </p:spPr>
         <p:txBody>
-          <a:bodyPr wrap="square" lIns="0" rIns="0" tIns="0" bIns="0" anchor="ctr">
+          <a:bodyPr wrap="square" lIns="0" tIns="0" rIns="0" bIns="0" anchor="ctr">
             <a:spAutoFit/>
           </a:bodyPr>
           <a:lstStyle/>
@@ -33297,7 +33316,7 @@
           <a:noFill/>
         </p:spPr>
         <p:txBody>
-          <a:bodyPr wrap="square" lIns="0" rIns="0" tIns="0" bIns="0" anchor="ctr">
+          <a:bodyPr wrap="square" lIns="0" tIns="0" rIns="0" bIns="0" anchor="ctr">
             <a:spAutoFit/>
           </a:bodyPr>
           <a:lstStyle/>
@@ -33334,7 +33353,7 @@
           <a:noFill/>
         </p:spPr>
         <p:txBody>
-          <a:bodyPr wrap="square" lIns="0" rIns="0" tIns="0" bIns="0" anchor="ctr">
+          <a:bodyPr wrap="square" lIns="0" tIns="0" rIns="0" bIns="0" anchor="ctr">
             <a:spAutoFit/>
           </a:bodyPr>
           <a:lstStyle/>
@@ -33371,7 +33390,7 @@
           <a:noFill/>
         </p:spPr>
         <p:txBody>
-          <a:bodyPr wrap="square" lIns="0" rIns="0" tIns="0" bIns="0" anchor="ctr">
+          <a:bodyPr wrap="square" lIns="0" tIns="0" rIns="0" bIns="0" anchor="ctr">
             <a:spAutoFit/>
           </a:bodyPr>
           <a:lstStyle/>
@@ -33408,7 +33427,7 @@
           <a:noFill/>
         </p:spPr>
         <p:txBody>
-          <a:bodyPr wrap="square" lIns="0" rIns="0" tIns="0" bIns="0" anchor="ctr">
+          <a:bodyPr wrap="square" lIns="0" tIns="0" rIns="0" bIns="0" anchor="ctr">
             <a:spAutoFit/>
           </a:bodyPr>
           <a:lstStyle/>
@@ -33445,7 +33464,7 @@
           <a:noFill/>
         </p:spPr>
         <p:txBody>
-          <a:bodyPr wrap="square" lIns="0" rIns="0" tIns="0" bIns="0" anchor="ctr">
+          <a:bodyPr wrap="square" lIns="0" tIns="0" rIns="0" bIns="0" anchor="ctr">
             <a:spAutoFit/>
           </a:bodyPr>
           <a:lstStyle/>
@@ -33526,7 +33545,6 @@
           <a:bodyPr/>
           <a:lstStyle/>
           <a:p>
-            <a:pPr/>
             <a:endParaRPr lang="ko-KR" altLang="en-US">
               <a:latin typeface="Pretendard"/>
               <a:ea typeface="Pretendard"/>
@@ -33692,7 +33710,6 @@
           <a:bodyPr/>
           <a:lstStyle/>
           <a:p>
-            <a:pPr/>
             <a:endParaRPr lang="ko-KR" altLang="en-US">
               <a:latin typeface="Pretendard"/>
               <a:ea typeface="Pretendard"/>
@@ -33729,7 +33746,6 @@
           <a:bodyPr/>
           <a:lstStyle/>
           <a:p>
-            <a:pPr/>
             <a:endParaRPr lang="ko-KR" altLang="en-US">
               <a:latin typeface="Pretendard"/>
               <a:ea typeface="Pretendard"/>
@@ -33852,7 +33868,6 @@
           <a:bodyPr/>
           <a:lstStyle/>
           <a:p>
-            <a:pPr/>
             <a:endParaRPr lang="ko-KR" altLang="en-US">
               <a:latin typeface="Pretendard"/>
               <a:ea typeface="Pretendard"/>
@@ -33975,7 +33990,6 @@
           <a:bodyPr/>
           <a:lstStyle/>
           <a:p>
-            <a:pPr/>
             <a:endParaRPr lang="ko-KR" altLang="en-US">
               <a:latin typeface="Pretendard"/>
               <a:ea typeface="Pretendard"/>
@@ -34098,7 +34112,6 @@
           <a:bodyPr/>
           <a:lstStyle/>
           <a:p>
-            <a:pPr/>
             <a:endParaRPr lang="ko-KR" altLang="en-US">
               <a:latin typeface="Pretendard"/>
               <a:ea typeface="Pretendard"/>
@@ -34221,7 +34234,6 @@
           <a:bodyPr/>
           <a:lstStyle/>
           <a:p>
-            <a:pPr/>
             <a:endParaRPr lang="ko-KR" altLang="en-US">
               <a:latin typeface="Pretendard"/>
               <a:ea typeface="Pretendard"/>
@@ -34258,7 +34270,6 @@
           <a:bodyPr/>
           <a:lstStyle/>
           <a:p>
-            <a:pPr/>
             <a:endParaRPr lang="ko-KR" altLang="en-US">
               <a:latin typeface="Pretendard"/>
               <a:ea typeface="Pretendard"/>
@@ -34381,7 +34392,6 @@
           <a:bodyPr/>
           <a:lstStyle/>
           <a:p>
-            <a:pPr/>
             <a:endParaRPr lang="ko-KR" altLang="en-US">
               <a:latin typeface="Pretendard"/>
               <a:ea typeface="Pretendard"/>
@@ -34504,7 +34514,6 @@
           <a:bodyPr/>
           <a:lstStyle/>
           <a:p>
-            <a:pPr/>
             <a:endParaRPr lang="ko-KR" altLang="en-US">
               <a:latin typeface="Pretendard"/>
               <a:ea typeface="Pretendard"/>
@@ -34627,7 +34636,6 @@
           <a:bodyPr/>
           <a:lstStyle/>
           <a:p>
-            <a:pPr/>
             <a:endParaRPr lang="ko-KR" altLang="en-US">
               <a:latin typeface="Pretendard"/>
               <a:ea typeface="Pretendard"/>
@@ -34750,7 +34758,6 @@
           <a:bodyPr/>
           <a:lstStyle/>
           <a:p>
-            <a:pPr/>
             <a:endParaRPr lang="ko-KR" altLang="en-US">
               <a:latin typeface="Pretendard"/>
               <a:ea typeface="Pretendard"/>
@@ -34787,7 +34794,6 @@
           <a:bodyPr/>
           <a:lstStyle/>
           <a:p>
-            <a:pPr/>
             <a:endParaRPr lang="ko-KR" altLang="en-US">
               <a:latin typeface="Pretendard"/>
               <a:ea typeface="Pretendard"/>
@@ -34910,7 +34916,6 @@
           <a:bodyPr/>
           <a:lstStyle/>
           <a:p>
-            <a:pPr/>
             <a:endParaRPr lang="ko-KR" altLang="en-US">
               <a:latin typeface="Pretendard"/>
               <a:ea typeface="Pretendard"/>
@@ -35033,7 +35038,6 @@
           <a:bodyPr/>
           <a:lstStyle/>
           <a:p>
-            <a:pPr/>
             <a:endParaRPr lang="ko-KR" altLang="en-US">
               <a:latin typeface="Pretendard"/>
               <a:ea typeface="Pretendard"/>
@@ -35156,7 +35160,6 @@
           <a:bodyPr/>
           <a:lstStyle/>
           <a:p>
-            <a:pPr/>
             <a:endParaRPr lang="ko-KR" altLang="en-US">
               <a:latin typeface="Pretendard"/>
               <a:ea typeface="Pretendard"/>
@@ -35354,7 +35357,7 @@
           <a:noFill/>
         </p:spPr>
         <p:txBody>
-          <a:bodyPr wrap="none" lIns="0" rIns="0" tIns="0" bIns="0">
+          <a:bodyPr wrap="none" lIns="0" tIns="0" rIns="0" bIns="0">
             <a:spAutoFit/>
           </a:bodyPr>
           <a:lstStyle/>
@@ -35435,7 +35438,6 @@
           <a:bodyPr/>
           <a:lstStyle/>
           <a:p>
-            <a:pPr/>
             <a:endParaRPr lang="ko-KR" altLang="en-US">
               <a:latin typeface="Pretendard"/>
               <a:ea typeface="Pretendard"/>
@@ -35719,7 +35721,7 @@
           <a:noFill/>
         </p:spPr>
         <p:txBody>
-          <a:bodyPr wrap="none" lIns="0" rIns="0" tIns="0" bIns="0">
+          <a:bodyPr wrap="none" lIns="0" tIns="0" rIns="0" bIns="0">
             <a:spAutoFit/>
           </a:bodyPr>
           <a:lstStyle/>
@@ -35826,7 +35828,7 @@
           <a:noFill/>
         </p:spPr>
         <p:txBody>
-          <a:bodyPr wrap="square" lIns="0" rIns="0" tIns="0" bIns="0" anchor="ctr">
+          <a:bodyPr wrap="square" lIns="0" tIns="0" rIns="0" bIns="0" anchor="ctr">
             <a:spAutoFit/>
           </a:bodyPr>
           <a:lstStyle/>
@@ -35898,7 +35900,7 @@
           <a:noFill/>
         </p:spPr>
         <p:txBody>
-          <a:bodyPr wrap="square" lIns="0" rIns="0" tIns="0" bIns="0" anchor="ctr">
+          <a:bodyPr wrap="square" lIns="0" tIns="0" rIns="0" bIns="0" anchor="ctr">
             <a:spAutoFit/>
           </a:bodyPr>
           <a:lstStyle/>
@@ -35970,7 +35972,7 @@
           <a:noFill/>
         </p:spPr>
         <p:txBody>
-          <a:bodyPr wrap="square" lIns="0" rIns="0" tIns="0" bIns="0" anchor="ctr">
+          <a:bodyPr wrap="square" lIns="0" tIns="0" rIns="0" bIns="0" anchor="ctr">
             <a:spAutoFit/>
           </a:bodyPr>
           <a:lstStyle/>
@@ -36042,7 +36044,7 @@
           <a:noFill/>
         </p:spPr>
         <p:txBody>
-          <a:bodyPr wrap="square" lIns="0" rIns="0" tIns="0" bIns="0" anchor="ctr">
+          <a:bodyPr wrap="square" lIns="0" tIns="0" rIns="0" bIns="0" anchor="ctr">
             <a:spAutoFit/>
           </a:bodyPr>
           <a:lstStyle/>
@@ -36079,7 +36081,7 @@
           <a:noFill/>
         </p:spPr>
         <p:txBody>
-          <a:bodyPr wrap="square" lIns="0" rIns="0" tIns="0" bIns="0" anchor="ctr">
+          <a:bodyPr wrap="square" lIns="0" tIns="0" rIns="0" bIns="0" anchor="ctr">
             <a:spAutoFit/>
           </a:bodyPr>
           <a:lstStyle/>
@@ -36140,6 +36142,7 @@
           <a:lstStyle/>
           <a:p>
             <a:pPr algn="ctr"/>
+            <a:endParaRPr/>
           </a:p>
         </p:txBody>
       </p:sp>
@@ -36160,7 +36163,7 @@
           <a:noFill/>
         </p:spPr>
         <p:txBody>
-          <a:bodyPr wrap="square" lIns="0" rIns="0" tIns="0" bIns="0" anchor="ctr">
+          <a:bodyPr wrap="square" lIns="0" tIns="0" rIns="0" bIns="0" anchor="ctr">
             <a:spAutoFit/>
           </a:bodyPr>
           <a:lstStyle/>
@@ -36223,6 +36226,7 @@
           <a:lstStyle/>
           <a:p>
             <a:pPr algn="ctr"/>
+            <a:endParaRPr/>
           </a:p>
         </p:txBody>
       </p:sp>
@@ -36243,7 +36247,7 @@
           <a:noFill/>
         </p:spPr>
         <p:txBody>
-          <a:bodyPr wrap="square" lIns="0" rIns="0" tIns="0" bIns="0" anchor="ctr">
+          <a:bodyPr wrap="square" lIns="0" tIns="0" rIns="0" bIns="0" anchor="ctr">
             <a:spAutoFit/>
           </a:bodyPr>
           <a:lstStyle/>
@@ -36280,7 +36284,7 @@
           <a:noFill/>
         </p:spPr>
         <p:txBody>
-          <a:bodyPr wrap="square" lIns="0" rIns="0" tIns="0" bIns="0" anchor="ctr">
+          <a:bodyPr wrap="square" lIns="0" tIns="0" rIns="0" bIns="0" anchor="ctr">
             <a:spAutoFit/>
           </a:bodyPr>
           <a:lstStyle/>
@@ -36343,6 +36347,7 @@
           <a:lstStyle/>
           <a:p>
             <a:pPr algn="ctr"/>
+            <a:endParaRPr/>
           </a:p>
         </p:txBody>
       </p:sp>
@@ -36363,7 +36368,7 @@
           <a:noFill/>
         </p:spPr>
         <p:txBody>
-          <a:bodyPr wrap="square" lIns="0" rIns="0" tIns="0" bIns="0" anchor="ctr">
+          <a:bodyPr wrap="square" lIns="0" tIns="0" rIns="0" bIns="0" anchor="ctr">
             <a:spAutoFit/>
           </a:bodyPr>
           <a:lstStyle/>
@@ -36426,6 +36431,7 @@
           <a:lstStyle/>
           <a:p>
             <a:pPr algn="ctr"/>
+            <a:endParaRPr/>
           </a:p>
         </p:txBody>
       </p:sp>
@@ -36446,7 +36452,7 @@
           <a:noFill/>
         </p:spPr>
         <p:txBody>
-          <a:bodyPr wrap="square" lIns="0" rIns="0" tIns="0" bIns="0" anchor="ctr">
+          <a:bodyPr wrap="square" lIns="0" tIns="0" rIns="0" bIns="0" anchor="ctr">
             <a:spAutoFit/>
           </a:bodyPr>
           <a:lstStyle/>
@@ -36483,7 +36489,7 @@
           <a:noFill/>
         </p:spPr>
         <p:txBody>
-          <a:bodyPr wrap="square" lIns="0" rIns="0" tIns="0" bIns="0" anchor="ctr">
+          <a:bodyPr wrap="square" lIns="0" tIns="0" rIns="0" bIns="0" anchor="ctr">
             <a:spAutoFit/>
           </a:bodyPr>
           <a:lstStyle/>
@@ -36546,6 +36552,7 @@
           <a:lstStyle/>
           <a:p>
             <a:pPr algn="ctr"/>
+            <a:endParaRPr/>
           </a:p>
         </p:txBody>
       </p:sp>
@@ -36566,7 +36573,7 @@
           <a:noFill/>
         </p:spPr>
         <p:txBody>
-          <a:bodyPr wrap="square" lIns="0" rIns="0" tIns="0" bIns="0" anchor="ctr">
+          <a:bodyPr wrap="square" lIns="0" tIns="0" rIns="0" bIns="0" anchor="ctr">
             <a:spAutoFit/>
           </a:bodyPr>
           <a:lstStyle/>
@@ -36629,6 +36636,7 @@
           <a:lstStyle/>
           <a:p>
             <a:pPr algn="ctr"/>
+            <a:endParaRPr/>
           </a:p>
         </p:txBody>
       </p:sp>
@@ -36649,7 +36657,7 @@
           <a:noFill/>
         </p:spPr>
         <p:txBody>
-          <a:bodyPr wrap="square" lIns="0" rIns="0" tIns="0" bIns="0" anchor="ctr">
+          <a:bodyPr wrap="square" lIns="0" tIns="0" rIns="0" bIns="0" anchor="ctr">
             <a:spAutoFit/>
           </a:bodyPr>
           <a:lstStyle/>
@@ -36686,7 +36694,7 @@
           <a:noFill/>
         </p:spPr>
         <p:txBody>
-          <a:bodyPr wrap="square" lIns="0" rIns="0" tIns="0" bIns="0" anchor="ctr">
+          <a:bodyPr wrap="square" lIns="0" tIns="0" rIns="0" bIns="0" anchor="ctr">
             <a:spAutoFit/>
           </a:bodyPr>
           <a:lstStyle/>
@@ -36749,6 +36757,7 @@
           <a:lstStyle/>
           <a:p>
             <a:pPr algn="ctr"/>
+            <a:endParaRPr/>
           </a:p>
         </p:txBody>
       </p:sp>
@@ -36769,7 +36778,7 @@
           <a:noFill/>
         </p:spPr>
         <p:txBody>
-          <a:bodyPr wrap="square" lIns="0" rIns="0" tIns="0" bIns="0" anchor="ctr">
+          <a:bodyPr wrap="square" lIns="0" tIns="0" rIns="0" bIns="0" anchor="ctr">
             <a:spAutoFit/>
           </a:bodyPr>
           <a:lstStyle/>
@@ -36832,6 +36841,7 @@
           <a:lstStyle/>
           <a:p>
             <a:pPr algn="ctr"/>
+            <a:endParaRPr/>
           </a:p>
         </p:txBody>
       </p:sp>
@@ -36852,7 +36862,7 @@
           <a:noFill/>
         </p:spPr>
         <p:txBody>
-          <a:bodyPr wrap="square" lIns="0" rIns="0" tIns="0" bIns="0" anchor="ctr">
+          <a:bodyPr wrap="square" lIns="0" tIns="0" rIns="0" bIns="0" anchor="ctr">
             <a:spAutoFit/>
           </a:bodyPr>
           <a:lstStyle/>
@@ -36889,7 +36899,7 @@
           <a:noFill/>
         </p:spPr>
         <p:txBody>
-          <a:bodyPr wrap="square" lIns="0" rIns="0" tIns="0" bIns="0" anchor="ctr">
+          <a:bodyPr wrap="square" lIns="0" tIns="0" rIns="0" bIns="0" anchor="ctr">
             <a:spAutoFit/>
           </a:bodyPr>
           <a:lstStyle/>
@@ -36970,7 +36980,6 @@
           <a:bodyPr/>
           <a:lstStyle/>
           <a:p>
-            <a:pPr/>
             <a:endParaRPr lang="ko-KR" altLang="en-US">
               <a:latin typeface="Pretendard"/>
               <a:ea typeface="Pretendard"/>
@@ -37136,7 +37145,6 @@
           <a:bodyPr/>
           <a:lstStyle/>
           <a:p>
-            <a:pPr/>
             <a:endParaRPr lang="ko-KR" altLang="en-US">
               <a:latin typeface="Pretendard"/>
               <a:ea typeface="Pretendard"/>
@@ -37173,7 +37181,6 @@
           <a:bodyPr/>
           <a:lstStyle/>
           <a:p>
-            <a:pPr/>
             <a:endParaRPr lang="ko-KR" altLang="en-US">
               <a:latin typeface="Pretendard"/>
               <a:ea typeface="Pretendard"/>
@@ -37597,7 +37604,6 @@
           <a:bodyPr/>
           <a:lstStyle/>
           <a:p>
-            <a:pPr/>
             <a:endParaRPr lang="ko-KR" altLang="en-US">
               <a:latin typeface="Pretendard"/>
               <a:ea typeface="Pretendard"/>
@@ -38397,7 +38403,7 @@
           <a:noFill/>
         </p:spPr>
         <p:txBody>
-          <a:bodyPr wrap="none" lIns="0" rIns="0" tIns="0" bIns="0">
+          <a:bodyPr wrap="none" lIns="0" tIns="0" rIns="0" bIns="0">
             <a:spAutoFit/>
           </a:bodyPr>
           <a:lstStyle/>
@@ -38478,7 +38484,6 @@
           <a:bodyPr/>
           <a:lstStyle/>
           <a:p>
-            <a:pPr/>
             <a:endParaRPr lang="ko-KR" altLang="en-US">
               <a:latin typeface="Pretendard"/>
               <a:ea typeface="Pretendard"/>
@@ -39450,7 +39455,7 @@
           <a:noFill/>
         </p:spPr>
         <p:txBody>
-          <a:bodyPr wrap="none" lIns="0" rIns="0" tIns="0" bIns="0">
+          <a:bodyPr wrap="none" lIns="0" tIns="0" rIns="0" bIns="0">
             <a:spAutoFit/>
           </a:bodyPr>
           <a:lstStyle/>
@@ -39531,7 +39536,6 @@
           <a:bodyPr/>
           <a:lstStyle/>
           <a:p>
-            <a:pPr/>
             <a:endParaRPr lang="ko-KR" altLang="en-US">
               <a:latin typeface="Pretendard"/>
               <a:ea typeface="Pretendard"/>
@@ -39697,7 +39701,6 @@
           <a:bodyPr/>
           <a:lstStyle/>
           <a:p>
-            <a:pPr/>
             <a:endParaRPr lang="ko-KR" altLang="en-US">
               <a:latin typeface="Pretendard"/>
               <a:ea typeface="Pretendard"/>
@@ -39734,7 +39737,6 @@
           <a:bodyPr/>
           <a:lstStyle/>
           <a:p>
-            <a:pPr/>
             <a:endParaRPr lang="ko-KR" altLang="en-US">
               <a:latin typeface="Pretendard"/>
               <a:ea typeface="Pretendard"/>
@@ -40072,7 +40074,6 @@
           <a:bodyPr/>
           <a:lstStyle/>
           <a:p>
-            <a:pPr/>
             <a:endParaRPr lang="ko-KR" altLang="en-US">
               <a:latin typeface="Pretendard"/>
               <a:ea typeface="Pretendard"/>
@@ -40152,7 +40153,6 @@
           <a:bodyPr/>
           <a:lstStyle/>
           <a:p>
-            <a:pPr/>
             <a:endParaRPr lang="ko-KR" altLang="en-US">
               <a:latin typeface="Pretendard"/>
               <a:ea typeface="Pretendard"/>
@@ -40318,7 +40318,6 @@
           <a:bodyPr/>
           <a:lstStyle/>
           <a:p>
-            <a:pPr/>
             <a:endParaRPr lang="ko-KR" altLang="en-US">
               <a:latin typeface="Pretendard"/>
               <a:ea typeface="Pretendard"/>
@@ -40484,7 +40483,6 @@
           <a:bodyPr/>
           <a:lstStyle/>
           <a:p>
-            <a:pPr/>
             <a:endParaRPr lang="ko-KR" altLang="en-US">
               <a:latin typeface="Pretendard"/>
               <a:ea typeface="Pretendard"/>
@@ -40650,7 +40648,6 @@
           <a:bodyPr/>
           <a:lstStyle/>
           <a:p>
-            <a:pPr/>
             <a:endParaRPr lang="ko-KR" altLang="en-US">
               <a:latin typeface="Pretendard"/>
               <a:ea typeface="Pretendard"/>
@@ -40934,7 +40931,7 @@
           <a:noFill/>
         </p:spPr>
         <p:txBody>
-          <a:bodyPr wrap="none" lIns="0" rIns="0" tIns="0" bIns="0">
+          <a:bodyPr wrap="none" lIns="0" tIns="0" rIns="0" bIns="0">
             <a:spAutoFit/>
           </a:bodyPr>
           <a:lstStyle/>
@@ -40995,6 +40992,7 @@
           <a:lstStyle/>
           <a:p>
             <a:pPr algn="ctr"/>
+            <a:endParaRPr/>
           </a:p>
         </p:txBody>
       </p:sp>
@@ -41039,6 +41037,7 @@
           <a:lstStyle/>
           <a:p>
             <a:pPr algn="ctr"/>
+            <a:endParaRPr/>
           </a:p>
         </p:txBody>
       </p:sp>
@@ -41083,6 +41082,7 @@
           <a:lstStyle/>
           <a:p>
             <a:pPr algn="ctr"/>
+            <a:endParaRPr/>
           </a:p>
         </p:txBody>
       </p:sp>
@@ -41147,7 +41147,6 @@
           <a:bodyPr/>
           <a:lstStyle/>
           <a:p>
-            <a:pPr/>
             <a:endParaRPr lang="ko-KR" altLang="en-US">
               <a:latin typeface="Pretendard"/>
               <a:ea typeface="Pretendard"/>
@@ -41313,7 +41312,6 @@
           <a:bodyPr/>
           <a:lstStyle/>
           <a:p>
-            <a:pPr/>
             <a:endParaRPr lang="ko-KR" altLang="en-US">
               <a:latin typeface="Pretendard"/>
               <a:ea typeface="Pretendard"/>
@@ -41350,7 +41348,6 @@
           <a:bodyPr/>
           <a:lstStyle/>
           <a:p>
-            <a:pPr/>
             <a:endParaRPr lang="ko-KR" altLang="en-US">
               <a:latin typeface="Pretendard"/>
               <a:ea typeface="Pretendard"/>
@@ -41559,7 +41556,6 @@
           <a:bodyPr/>
           <a:lstStyle/>
           <a:p>
-            <a:pPr/>
             <a:endParaRPr lang="ko-KR" altLang="en-US">
               <a:latin typeface="Pretendard"/>
               <a:ea typeface="Pretendard"/>
@@ -41596,7 +41592,6 @@
           <a:bodyPr/>
           <a:lstStyle/>
           <a:p>
-            <a:pPr/>
             <a:endParaRPr lang="ko-KR" altLang="en-US">
               <a:latin typeface="Pretendard"/>
               <a:ea typeface="Pretendard"/>
@@ -41805,7 +41800,6 @@
           <a:bodyPr/>
           <a:lstStyle/>
           <a:p>
-            <a:pPr/>
             <a:endParaRPr lang="ko-KR" altLang="en-US">
               <a:latin typeface="Pretendard"/>
               <a:ea typeface="Pretendard"/>
@@ -41842,7 +41836,6 @@
           <a:bodyPr/>
           <a:lstStyle/>
           <a:p>
-            <a:pPr/>
             <a:endParaRPr lang="ko-KR" altLang="en-US">
               <a:latin typeface="Pretendard"/>
               <a:ea typeface="Pretendard"/>
@@ -42051,7 +42044,6 @@
           <a:bodyPr/>
           <a:lstStyle/>
           <a:p>
-            <a:pPr/>
             <a:endParaRPr lang="ko-KR" altLang="en-US">
               <a:latin typeface="Pretendard"/>
               <a:ea typeface="Pretendard"/>
@@ -42088,7 +42080,6 @@
           <a:bodyPr/>
           <a:lstStyle/>
           <a:p>
-            <a:pPr/>
             <a:endParaRPr lang="ko-KR" altLang="en-US">
               <a:latin typeface="Pretendard"/>
               <a:ea typeface="Pretendard"/>
@@ -42565,7 +42556,7 @@
           <a:noFill/>
         </p:spPr>
         <p:txBody>
-          <a:bodyPr wrap="none" lIns="0" rIns="0" tIns="0" bIns="0">
+          <a:bodyPr wrap="none" lIns="0" tIns="0" rIns="0" bIns="0">
             <a:spAutoFit/>
           </a:bodyPr>
           <a:lstStyle/>
@@ -42663,6 +42654,7 @@
           <a:lstStyle/>
           <a:p>
             <a:pPr algn="ctr"/>
+            <a:endParaRPr/>
           </a:p>
         </p:txBody>
       </p:sp>
@@ -42683,7 +42675,7 @@
           <a:noFill/>
         </p:spPr>
         <p:txBody>
-          <a:bodyPr wrap="square" lIns="0" rIns="0" tIns="0" bIns="0" anchor="ctr">
+          <a:bodyPr wrap="square" lIns="0" tIns="0" rIns="0" bIns="0" anchor="ctr">
             <a:spAutoFit/>
           </a:bodyPr>
           <a:lstStyle/>
@@ -42746,6 +42738,7 @@
           <a:lstStyle/>
           <a:p>
             <a:pPr algn="ctr"/>
+            <a:endParaRPr/>
           </a:p>
         </p:txBody>
       </p:sp>
@@ -42766,7 +42759,7 @@
           <a:noFill/>
         </p:spPr>
         <p:txBody>
-          <a:bodyPr wrap="square" lIns="0" rIns="0" tIns="0" bIns="0" anchor="ctr">
+          <a:bodyPr wrap="square" lIns="0" tIns="0" rIns="0" bIns="0" anchor="ctr">
             <a:spAutoFit/>
           </a:bodyPr>
           <a:lstStyle/>
@@ -42803,7 +42796,7 @@
           <a:noFill/>
         </p:spPr>
         <p:txBody>
-          <a:bodyPr wrap="square" lIns="0" rIns="0" tIns="0" bIns="0" anchor="ctr">
+          <a:bodyPr wrap="square" lIns="0" tIns="0" rIns="0" bIns="0" anchor="ctr">
             <a:spAutoFit/>
           </a:bodyPr>
           <a:lstStyle/>
@@ -42901,6 +42894,7 @@
           <a:lstStyle/>
           <a:p>
             <a:pPr algn="ctr"/>
+            <a:endParaRPr/>
           </a:p>
         </p:txBody>
       </p:sp>
@@ -42921,7 +42915,7 @@
           <a:noFill/>
         </p:spPr>
         <p:txBody>
-          <a:bodyPr wrap="square" lIns="0" rIns="0" tIns="0" bIns="0" anchor="ctr">
+          <a:bodyPr wrap="square" lIns="0" tIns="0" rIns="0" bIns="0" anchor="ctr">
             <a:spAutoFit/>
           </a:bodyPr>
           <a:lstStyle/>
@@ -42984,6 +42978,7 @@
           <a:lstStyle/>
           <a:p>
             <a:pPr algn="ctr"/>
+            <a:endParaRPr/>
           </a:p>
         </p:txBody>
       </p:sp>
@@ -43004,7 +42999,7 @@
           <a:noFill/>
         </p:spPr>
         <p:txBody>
-          <a:bodyPr wrap="square" lIns="0" rIns="0" tIns="0" bIns="0" anchor="ctr">
+          <a:bodyPr wrap="square" lIns="0" tIns="0" rIns="0" bIns="0" anchor="ctr">
             <a:spAutoFit/>
           </a:bodyPr>
           <a:lstStyle/>
@@ -43041,7 +43036,7 @@
           <a:noFill/>
         </p:spPr>
         <p:txBody>
-          <a:bodyPr wrap="square" lIns="0" rIns="0" tIns="0" bIns="0" anchor="ctr">
+          <a:bodyPr wrap="square" lIns="0" tIns="0" rIns="0" bIns="0" anchor="ctr">
             <a:spAutoFit/>
           </a:bodyPr>
           <a:lstStyle/>
@@ -43139,6 +43134,7 @@
           <a:lstStyle/>
           <a:p>
             <a:pPr algn="ctr"/>
+            <a:endParaRPr/>
           </a:p>
         </p:txBody>
       </p:sp>
@@ -43159,7 +43155,7 @@
           <a:noFill/>
         </p:spPr>
         <p:txBody>
-          <a:bodyPr wrap="square" lIns="0" rIns="0" tIns="0" bIns="0" anchor="ctr">
+          <a:bodyPr wrap="square" lIns="0" tIns="0" rIns="0" bIns="0" anchor="ctr">
             <a:spAutoFit/>
           </a:bodyPr>
           <a:lstStyle/>
@@ -43222,6 +43218,7 @@
           <a:lstStyle/>
           <a:p>
             <a:pPr algn="ctr"/>
+            <a:endParaRPr/>
           </a:p>
         </p:txBody>
       </p:sp>
@@ -43242,7 +43239,7 @@
           <a:noFill/>
         </p:spPr>
         <p:txBody>
-          <a:bodyPr wrap="square" lIns="0" rIns="0" tIns="0" bIns="0" anchor="ctr">
+          <a:bodyPr wrap="square" lIns="0" tIns="0" rIns="0" bIns="0" anchor="ctr">
             <a:spAutoFit/>
           </a:bodyPr>
           <a:lstStyle/>
@@ -43305,6 +43302,7 @@
           <a:lstStyle/>
           <a:p>
             <a:pPr algn="ctr"/>
+            <a:endParaRPr/>
           </a:p>
         </p:txBody>
       </p:sp>
@@ -43325,7 +43323,7 @@
           <a:noFill/>
         </p:spPr>
         <p:txBody>
-          <a:bodyPr wrap="square" lIns="0" rIns="0" tIns="0" bIns="0" anchor="ctr">
+          <a:bodyPr wrap="square" lIns="0" tIns="0" rIns="0" bIns="0" anchor="ctr">
             <a:spAutoFit/>
           </a:bodyPr>
           <a:lstStyle/>
@@ -43362,7 +43360,7 @@
           <a:noFill/>
         </p:spPr>
         <p:txBody>
-          <a:bodyPr wrap="square" lIns="0" rIns="0" tIns="0" bIns="0" anchor="ctr">
+          <a:bodyPr wrap="square" lIns="0" tIns="0" rIns="0" bIns="0" anchor="ctr">
             <a:spAutoFit/>
           </a:bodyPr>
           <a:lstStyle/>
@@ -43443,7 +43441,6 @@
           <a:bodyPr/>
           <a:lstStyle/>
           <a:p>
-            <a:pPr/>
             <a:endParaRPr lang="ko-KR" altLang="en-US">
               <a:latin typeface="Pretendard"/>
               <a:ea typeface="Pretendard"/>
@@ -43609,7 +43606,6 @@
           <a:bodyPr/>
           <a:lstStyle/>
           <a:p>
-            <a:pPr/>
             <a:endParaRPr lang="ko-KR" altLang="en-US">
               <a:latin typeface="Pretendard"/>
               <a:ea typeface="Pretendard"/>
@@ -43689,7 +43685,6 @@
           <a:bodyPr/>
           <a:lstStyle/>
           <a:p>
-            <a:pPr/>
             <a:endParaRPr lang="ko-KR" altLang="en-US">
               <a:latin typeface="Pretendard"/>
               <a:ea typeface="Pretendard"/>
@@ -43769,7 +43764,6 @@
           <a:bodyPr/>
           <a:lstStyle/>
           <a:p>
-            <a:pPr/>
             <a:endParaRPr lang="ko-KR" altLang="en-US">
               <a:latin typeface="Pretendard"/>
               <a:ea typeface="Pretendard"/>
@@ -43849,7 +43843,6 @@
           <a:bodyPr/>
           <a:lstStyle/>
           <a:p>
-            <a:pPr/>
             <a:endParaRPr lang="ko-KR" altLang="en-US">
               <a:latin typeface="Pretendard"/>
               <a:ea typeface="Pretendard"/>
@@ -43929,7 +43922,6 @@
           <a:bodyPr/>
           <a:lstStyle/>
           <a:p>
-            <a:pPr/>
             <a:endParaRPr lang="ko-KR" altLang="en-US">
               <a:latin typeface="Pretendard"/>
               <a:ea typeface="Pretendard"/>
@@ -44009,7 +44001,6 @@
           <a:bodyPr/>
           <a:lstStyle/>
           <a:p>
-            <a:pPr/>
             <a:endParaRPr lang="ko-KR" altLang="en-US">
               <a:latin typeface="Pretendard"/>
               <a:ea typeface="Pretendard"/>
@@ -44089,7 +44080,6 @@
           <a:bodyPr/>
           <a:lstStyle/>
           <a:p>
-            <a:pPr/>
             <a:endParaRPr lang="ko-KR" altLang="en-US">
               <a:latin typeface="Pretendard"/>
               <a:ea typeface="Pretendard"/>
@@ -44169,7 +44159,6 @@
           <a:bodyPr/>
           <a:lstStyle/>
           <a:p>
-            <a:pPr/>
             <a:endParaRPr lang="ko-KR" altLang="en-US">
               <a:latin typeface="Pretendard"/>
               <a:ea typeface="Pretendard"/>
@@ -44249,7 +44238,6 @@
           <a:bodyPr/>
           <a:lstStyle/>
           <a:p>
-            <a:pPr/>
             <a:endParaRPr lang="ko-KR" altLang="en-US">
               <a:latin typeface="Pretendard"/>
               <a:ea typeface="Pretendard"/>
@@ -44329,7 +44317,6 @@
           <a:bodyPr/>
           <a:lstStyle/>
           <a:p>
-            <a:pPr/>
             <a:endParaRPr lang="ko-KR" altLang="en-US">
               <a:latin typeface="Pretendard"/>
               <a:ea typeface="Pretendard"/>
@@ -44409,7 +44396,6 @@
           <a:bodyPr/>
           <a:lstStyle/>
           <a:p>
-            <a:pPr/>
             <a:endParaRPr lang="ko-KR" altLang="en-US">
               <a:latin typeface="Pretendard"/>
               <a:ea typeface="Pretendard"/>
@@ -44489,7 +44475,6 @@
           <a:bodyPr/>
           <a:lstStyle/>
           <a:p>
-            <a:pPr/>
             <a:endParaRPr lang="ko-KR" altLang="en-US">
               <a:latin typeface="Pretendard"/>
               <a:ea typeface="Pretendard"/>
@@ -44569,7 +44554,6 @@
           <a:bodyPr/>
           <a:lstStyle/>
           <a:p>
-            <a:pPr/>
             <a:endParaRPr lang="ko-KR" altLang="en-US">
               <a:latin typeface="Pretendard"/>
               <a:ea typeface="Pretendard"/>
@@ -44649,7 +44633,6 @@
           <a:bodyPr/>
           <a:lstStyle/>
           <a:p>
-            <a:pPr/>
             <a:endParaRPr lang="ko-KR" altLang="en-US">
               <a:latin typeface="Pretendard"/>
               <a:ea typeface="Pretendard"/>
@@ -44729,7 +44712,6 @@
           <a:bodyPr/>
           <a:lstStyle/>
           <a:p>
-            <a:pPr/>
             <a:endParaRPr lang="ko-KR" altLang="en-US">
               <a:latin typeface="Pretendard"/>
               <a:ea typeface="Pretendard"/>
@@ -44809,7 +44791,6 @@
           <a:bodyPr/>
           <a:lstStyle/>
           <a:p>
-            <a:pPr/>
             <a:endParaRPr lang="ko-KR" altLang="en-US">
               <a:latin typeface="Pretendard"/>
               <a:ea typeface="Pretendard"/>
@@ -44889,7 +44870,6 @@
           <a:bodyPr/>
           <a:lstStyle/>
           <a:p>
-            <a:pPr/>
             <a:endParaRPr lang="ko-KR" altLang="en-US">
               <a:latin typeface="Pretendard"/>
               <a:ea typeface="Pretendard"/>
@@ -44969,7 +44949,6 @@
           <a:bodyPr/>
           <a:lstStyle/>
           <a:p>
-            <a:pPr/>
             <a:endParaRPr lang="ko-KR" altLang="en-US">
               <a:latin typeface="Pretendard"/>
               <a:ea typeface="Pretendard"/>
@@ -45049,7 +45028,6 @@
           <a:bodyPr/>
           <a:lstStyle/>
           <a:p>
-            <a:pPr/>
             <a:endParaRPr lang="ko-KR" altLang="en-US">
               <a:latin typeface="Pretendard"/>
               <a:ea typeface="Pretendard"/>
@@ -45129,7 +45107,6 @@
           <a:bodyPr/>
           <a:lstStyle/>
           <a:p>
-            <a:pPr/>
             <a:endParaRPr lang="ko-KR" altLang="en-US">
               <a:latin typeface="Pretendard"/>
               <a:ea typeface="Pretendard"/>
@@ -45209,7 +45186,6 @@
           <a:bodyPr/>
           <a:lstStyle/>
           <a:p>
-            <a:pPr/>
             <a:endParaRPr lang="ko-KR" altLang="en-US">
               <a:latin typeface="Pretendard"/>
               <a:ea typeface="Pretendard"/>
@@ -45289,7 +45265,6 @@
           <a:bodyPr/>
           <a:lstStyle/>
           <a:p>
-            <a:pPr/>
             <a:endParaRPr lang="ko-KR" altLang="en-US">
               <a:latin typeface="Pretendard"/>
               <a:ea typeface="Pretendard"/>
@@ -45369,7 +45344,6 @@
           <a:bodyPr/>
           <a:lstStyle/>
           <a:p>
-            <a:pPr/>
             <a:endParaRPr lang="ko-KR" altLang="en-US">
               <a:latin typeface="Pretendard"/>
               <a:ea typeface="Pretendard"/>
@@ -45449,7 +45423,6 @@
           <a:bodyPr/>
           <a:lstStyle/>
           <a:p>
-            <a:pPr/>
             <a:endParaRPr lang="ko-KR" altLang="en-US">
               <a:latin typeface="Pretendard"/>
               <a:ea typeface="Pretendard"/>
@@ -45529,7 +45502,6 @@
           <a:bodyPr/>
           <a:lstStyle/>
           <a:p>
-            <a:pPr/>
             <a:endParaRPr lang="ko-KR" altLang="en-US">
               <a:latin typeface="Pretendard"/>
               <a:ea typeface="Pretendard"/>
@@ -45609,7 +45581,6 @@
           <a:bodyPr/>
           <a:lstStyle/>
           <a:p>
-            <a:pPr/>
             <a:endParaRPr lang="ko-KR" altLang="en-US">
               <a:latin typeface="Pretendard"/>
               <a:ea typeface="Pretendard"/>
@@ -45689,7 +45660,6 @@
           <a:bodyPr/>
           <a:lstStyle/>
           <a:p>
-            <a:pPr/>
             <a:endParaRPr lang="ko-KR" altLang="en-US">
               <a:latin typeface="Pretendard"/>
               <a:ea typeface="Pretendard"/>
@@ -45769,7 +45739,6 @@
           <a:bodyPr/>
           <a:lstStyle/>
           <a:p>
-            <a:pPr/>
             <a:endParaRPr lang="ko-KR" altLang="en-US">
               <a:latin typeface="Pretendard"/>
               <a:ea typeface="Pretendard"/>
@@ -45849,7 +45818,6 @@
           <a:bodyPr/>
           <a:lstStyle/>
           <a:p>
-            <a:pPr/>
             <a:endParaRPr lang="ko-KR" altLang="en-US">
               <a:latin typeface="Pretendard"/>
               <a:ea typeface="Pretendard"/>
@@ -45929,7 +45897,6 @@
           <a:bodyPr/>
           <a:lstStyle/>
           <a:p>
-            <a:pPr/>
             <a:endParaRPr lang="ko-KR" altLang="en-US">
               <a:latin typeface="Pretendard"/>
               <a:ea typeface="Pretendard"/>
@@ -46009,7 +45976,6 @@
           <a:bodyPr/>
           <a:lstStyle/>
           <a:p>
-            <a:pPr/>
             <a:endParaRPr lang="ko-KR" altLang="en-US">
               <a:latin typeface="Pretendard"/>
               <a:ea typeface="Pretendard"/>
@@ -46089,7 +46055,6 @@
           <a:bodyPr/>
           <a:lstStyle/>
           <a:p>
-            <a:pPr/>
             <a:endParaRPr lang="ko-KR" altLang="en-US">
               <a:latin typeface="Pretendard"/>
               <a:ea typeface="Pretendard"/>
@@ -46169,7 +46134,6 @@
           <a:bodyPr/>
           <a:lstStyle/>
           <a:p>
-            <a:pPr/>
             <a:endParaRPr lang="ko-KR" altLang="en-US">
               <a:latin typeface="Pretendard"/>
               <a:ea typeface="Pretendard"/>
@@ -46249,7 +46213,6 @@
           <a:bodyPr/>
           <a:lstStyle/>
           <a:p>
-            <a:pPr/>
             <a:endParaRPr lang="ko-KR" altLang="en-US">
               <a:latin typeface="Pretendard"/>
               <a:ea typeface="Pretendard"/>
@@ -46329,7 +46292,6 @@
           <a:bodyPr/>
           <a:lstStyle/>
           <a:p>
-            <a:pPr/>
             <a:endParaRPr lang="ko-KR" altLang="en-US">
               <a:latin typeface="Pretendard"/>
               <a:ea typeface="Pretendard"/>
@@ -46409,7 +46371,6 @@
           <a:bodyPr/>
           <a:lstStyle/>
           <a:p>
-            <a:pPr/>
             <a:endParaRPr lang="ko-KR" altLang="en-US">
               <a:latin typeface="Pretendard"/>
               <a:ea typeface="Pretendard"/>
@@ -46489,7 +46450,6 @@
           <a:bodyPr/>
           <a:lstStyle/>
           <a:p>
-            <a:pPr/>
             <a:endParaRPr lang="ko-KR" altLang="en-US">
               <a:latin typeface="Pretendard"/>
               <a:ea typeface="Pretendard"/>
@@ -46569,7 +46529,6 @@
           <a:bodyPr/>
           <a:lstStyle/>
           <a:p>
-            <a:pPr/>
             <a:endParaRPr lang="ko-KR" altLang="en-US">
               <a:latin typeface="Pretendard"/>
               <a:ea typeface="Pretendard"/>
@@ -46649,7 +46608,6 @@
           <a:bodyPr/>
           <a:lstStyle/>
           <a:p>
-            <a:pPr/>
             <a:endParaRPr lang="ko-KR" altLang="en-US">
               <a:latin typeface="Pretendard"/>
               <a:ea typeface="Pretendard"/>
@@ -46729,7 +46687,6 @@
           <a:bodyPr/>
           <a:lstStyle/>
           <a:p>
-            <a:pPr/>
             <a:endParaRPr lang="ko-KR" altLang="en-US">
               <a:latin typeface="Pretendard"/>
               <a:ea typeface="Pretendard"/>
@@ -46809,7 +46766,6 @@
           <a:bodyPr/>
           <a:lstStyle/>
           <a:p>
-            <a:pPr/>
             <a:endParaRPr lang="ko-KR" altLang="en-US">
               <a:latin typeface="Pretendard"/>
               <a:ea typeface="Pretendard"/>
@@ -46889,7 +46845,6 @@
           <a:bodyPr/>
           <a:lstStyle/>
           <a:p>
-            <a:pPr/>
             <a:endParaRPr lang="ko-KR" altLang="en-US">
               <a:latin typeface="Pretendard"/>
               <a:ea typeface="Pretendard"/>
@@ -46969,7 +46924,6 @@
           <a:bodyPr/>
           <a:lstStyle/>
           <a:p>
-            <a:pPr/>
             <a:endParaRPr lang="ko-KR" altLang="en-US">
               <a:latin typeface="Pretendard"/>
               <a:ea typeface="Pretendard"/>
@@ -47049,7 +47003,6 @@
           <a:bodyPr/>
           <a:lstStyle/>
           <a:p>
-            <a:pPr/>
             <a:endParaRPr lang="ko-KR" altLang="en-US">
               <a:latin typeface="Pretendard"/>
               <a:ea typeface="Pretendard"/>
@@ -47129,7 +47082,6 @@
           <a:bodyPr/>
           <a:lstStyle/>
           <a:p>
-            <a:pPr/>
             <a:endParaRPr lang="ko-KR" altLang="en-US">
               <a:latin typeface="Pretendard"/>
               <a:ea typeface="Pretendard"/>
@@ -47209,7 +47161,6 @@
           <a:bodyPr/>
           <a:lstStyle/>
           <a:p>
-            <a:pPr/>
             <a:endParaRPr lang="ko-KR" altLang="en-US">
               <a:latin typeface="Pretendard"/>
               <a:ea typeface="Pretendard"/>
@@ -47289,7 +47240,6 @@
           <a:bodyPr/>
           <a:lstStyle/>
           <a:p>
-            <a:pPr/>
             <a:endParaRPr lang="ko-KR" altLang="en-US">
               <a:latin typeface="Pretendard"/>
               <a:ea typeface="Pretendard"/>
@@ -47369,7 +47319,6 @@
           <a:bodyPr/>
           <a:lstStyle/>
           <a:p>
-            <a:pPr/>
             <a:endParaRPr lang="ko-KR" altLang="en-US">
               <a:latin typeface="Pretendard"/>
               <a:ea typeface="Pretendard"/>
@@ -47418,172 +47367,6 @@
               <a:ea typeface="Pretendard"/>
               <a:cs typeface="Pretendard"/>
             </a:endParaRPr>
-          </a:p>
-        </p:txBody>
-      </p:sp>
-      <p:sp>
-        <p:nvSpPr>
-          <p:cNvPr id="102" name="Text 100"/>
-          <p:cNvSpPr/>
-          <p:nvPr/>
-        </p:nvSpPr>
-        <p:spPr>
-          <a:xfrm>
-            <a:off x="457200" y="4617720"/>
-            <a:ext cx="8229600" cy="201168"/>
-          </a:xfrm>
-          <a:prstGeom prst="rect">
-            <a:avLst/>
-          </a:prstGeom>
-          <a:noFill/>
-          <a:ln/>
-        </p:spPr>
-        <p:txBody>
-          <a:bodyPr wrap="square" lIns="0" tIns="0" rIns="0" bIns="0" rtlCol="0" anchor="ctr"/>
-          <a:lstStyle/>
-          <a:p>
-            <a:pPr marL="0" indent="0">
-              <a:buNone/>
-            </a:pPr>
-            <a:r>
-              <a:rPr lang="en-US" sz="900" dirty="0">
-                <a:solidFill>
-                  <a:srgbClr val="6B7280"/>
-                </a:solidFill>
-                <a:latin typeface="Pretendard"/>
-                <a:ea typeface="Pretendard"/>
-                <a:cs typeface="Pretendard"/>
-              </a:rPr>
-              <a:t>●  지원   /   ○  미지원   /   API  외부 API 위임</a:t>
-            </a:r>
-            <a:endParaRPr lang="en-US" sz="900" dirty="0">
-              <a:latin typeface="Pretendard"/>
-              <a:ea typeface="Pretendard"/>
-              <a:cs typeface="Pretendard"/>
-            </a:endParaRPr>
-          </a:p>
-        </p:txBody>
-      </p:sp>
-      <p:sp>
-        <p:nvSpPr>
-          <p:cNvPr id="103" name="Text 101"/>
-          <p:cNvSpPr/>
-          <p:nvPr/>
-        </p:nvSpPr>
-        <p:spPr>
-          <a:xfrm>
-            <a:off x="457200" y="4846320"/>
-            <a:ext cx="6217920" cy="201168"/>
-          </a:xfrm>
-          <a:prstGeom prst="rect">
-            <a:avLst/>
-          </a:prstGeom>
-          <a:noFill/>
-          <a:ln/>
-        </p:spPr>
-        <p:txBody>
-          <a:bodyPr wrap="square" lIns="0" tIns="0" rIns="0" bIns="0" rtlCol="0" anchor="ctr"/>
-          <a:lstStyle/>
-          <a:p>
-            <a:pPr marL="0" indent="0">
-              <a:buNone/>
-            </a:pPr>
-            <a:r>
-              <a:rPr lang="en-US" sz="900" dirty="0">
-                <a:solidFill>
-                  <a:srgbClr val="6B7280"/>
-                </a:solidFill>
-                <a:latin typeface="Pretendard"/>
-                <a:ea typeface="Pretendard"/>
-                <a:cs typeface="Pretendard"/>
-              </a:rPr>
-              <a:t>관광 일정 QA 엔진  ·  Explainable Travel Plan Validator</a:t>
-            </a:r>
-            <a:endParaRPr lang="en-US" sz="900" dirty="0">
-              <a:latin typeface="Pretendard"/>
-              <a:ea typeface="Pretendard"/>
-              <a:cs typeface="Pretendard"/>
-            </a:endParaRPr>
-          </a:p>
-        </p:txBody>
-      </p:sp>
-      <p:sp>
-        <p:nvSpPr>
-          <p:cNvPr id="104" name="Text 102"/>
-          <p:cNvSpPr/>
-          <p:nvPr/>
-        </p:nvSpPr>
-        <p:spPr>
-          <a:xfrm>
-            <a:off x="6766560" y="4846320"/>
-            <a:ext cx="1920240" cy="201168"/>
-          </a:xfrm>
-          <a:prstGeom prst="rect">
-            <a:avLst/>
-          </a:prstGeom>
-          <a:noFill/>
-          <a:ln/>
-        </p:spPr>
-        <p:txBody>
-          <a:bodyPr wrap="square" lIns="0" tIns="0" rIns="0" bIns="0" rtlCol="0" anchor="ctr"/>
-          <a:lstStyle/>
-          <a:p>
-            <a:pPr marL="0" indent="0" algn="r">
-              <a:buNone/>
-            </a:pPr>
-            <a:r>
-              <a:rPr lang="en-US" sz="900" dirty="0">
-                <a:solidFill>
-                  <a:srgbClr val="9CA3AF"/>
-                </a:solidFill>
-                <a:latin typeface="Pretendard"/>
-                <a:ea typeface="Pretendard"/>
-                <a:cs typeface="Pretendard"/>
-              </a:rPr>
-              <a:t>05 / 24</a:t>
-            </a:r>
-            <a:endParaRPr lang="en-US" sz="900" dirty="0">
-              <a:latin typeface="Pretendard"/>
-              <a:ea typeface="Pretendard"/>
-              <a:cs typeface="Pretendard"/>
-            </a:endParaRPr>
-          </a:p>
-        </p:txBody>
-      </p:sp>
-      <p:sp>
-        <p:nvSpPr>
-          <p:cNvPr id="105" name="TextBox 104"/>
-          <p:cNvSpPr txBox="1"/>
-          <p:nvPr/>
-        </p:nvSpPr>
-        <p:spPr>
-          <a:xfrm>
-            <a:off x="7635240" y="4777740"/>
-            <a:ext cx="1188720" cy="256032"/>
-          </a:xfrm>
-          <a:prstGeom prst="rect">
-            <a:avLst/>
-          </a:prstGeom>
-          <a:noFill/>
-        </p:spPr>
-        <p:txBody>
-          <a:bodyPr wrap="none" lIns="0" rIns="0" tIns="0" bIns="0">
-            <a:spAutoFit/>
-          </a:bodyPr>
-          <a:lstStyle/>
-          <a:p>
-            <a:pPr algn="ctr"/>
-            <a:r>
-              <a:rPr sz="800" i="1">
-                <a:solidFill>
-                  <a:srgbClr val="9CA3AF"/>
-                </a:solidFill>
-                <a:latin typeface="Pretendard"/>
-                <a:ea typeface="Pretendard"/>
-                <a:cs typeface="Pretendard"/>
-              </a:rPr>
-              <a:t>[ Brandlogy logo ]</a:t>
-            </a:r>
           </a:p>
         </p:txBody>
       </p:sp>
@@ -47648,7 +47431,6 @@
           <a:bodyPr/>
           <a:lstStyle/>
           <a:p>
-            <a:pPr/>
             <a:endParaRPr lang="ko-KR" altLang="en-US">
               <a:latin typeface="Pretendard"/>
               <a:ea typeface="Pretendard"/>
@@ -48029,7 +47811,6 @@
           <a:bodyPr/>
           <a:lstStyle/>
           <a:p>
-            <a:pPr/>
             <a:endParaRPr lang="ko-KR" altLang="en-US">
               <a:latin typeface="Pretendard"/>
               <a:ea typeface="Pretendard"/>
@@ -48442,7 +48223,7 @@
           <a:noFill/>
         </p:spPr>
         <p:txBody>
-          <a:bodyPr wrap="none" lIns="0" rIns="0" tIns="0" bIns="0">
+          <a:bodyPr wrap="none" lIns="0" tIns="0" rIns="0" bIns="0">
             <a:spAutoFit/>
           </a:bodyPr>
           <a:lstStyle/>
@@ -48523,7 +48304,6 @@
           <a:bodyPr/>
           <a:lstStyle/>
           <a:p>
-            <a:pPr/>
             <a:endParaRPr lang="ko-KR" altLang="en-US">
               <a:latin typeface="Pretendard"/>
               <a:ea typeface="Pretendard"/>
@@ -48689,7 +48469,6 @@
           <a:bodyPr/>
           <a:lstStyle/>
           <a:p>
-            <a:pPr/>
             <a:endParaRPr lang="ko-KR" altLang="en-US">
               <a:latin typeface="Pretendard"/>
               <a:ea typeface="Pretendard"/>
@@ -48726,7 +48505,6 @@
           <a:bodyPr/>
           <a:lstStyle/>
           <a:p>
-            <a:pPr/>
             <a:endParaRPr lang="ko-KR" altLang="en-US">
               <a:latin typeface="Pretendard"/>
               <a:ea typeface="Pretendard"/>
@@ -48892,7 +48670,6 @@
           <a:bodyPr/>
           <a:lstStyle/>
           <a:p>
-            <a:pPr/>
             <a:endParaRPr lang="ko-KR" altLang="en-US">
               <a:latin typeface="Pretendard"/>
               <a:ea typeface="Pretendard"/>
@@ -48929,7 +48706,6 @@
           <a:bodyPr/>
           <a:lstStyle/>
           <a:p>
-            <a:pPr/>
             <a:endParaRPr lang="ko-KR" altLang="en-US">
               <a:latin typeface="Pretendard"/>
               <a:ea typeface="Pretendard"/>
@@ -49095,7 +48871,6 @@
           <a:bodyPr/>
           <a:lstStyle/>
           <a:p>
-            <a:pPr/>
             <a:endParaRPr lang="ko-KR" altLang="en-US">
               <a:latin typeface="Pretendard"/>
               <a:ea typeface="Pretendard"/>
@@ -49132,7 +48907,6 @@
           <a:bodyPr/>
           <a:lstStyle/>
           <a:p>
-            <a:pPr/>
             <a:endParaRPr lang="ko-KR" altLang="en-US">
               <a:latin typeface="Pretendard"/>
               <a:ea typeface="Pretendard"/>
@@ -49298,7 +49072,6 @@
           <a:bodyPr/>
           <a:lstStyle/>
           <a:p>
-            <a:pPr/>
             <a:endParaRPr lang="ko-KR" altLang="en-US">
               <a:latin typeface="Pretendard"/>
               <a:ea typeface="Pretendard"/>
@@ -49335,7 +49108,6 @@
           <a:bodyPr/>
           <a:lstStyle/>
           <a:p>
-            <a:pPr/>
             <a:endParaRPr lang="ko-KR" altLang="en-US">
               <a:latin typeface="Pretendard"/>
               <a:ea typeface="Pretendard"/>
@@ -49501,7 +49273,6 @@
           <a:bodyPr/>
           <a:lstStyle/>
           <a:p>
-            <a:pPr/>
             <a:endParaRPr lang="ko-KR" altLang="en-US">
               <a:latin typeface="Pretendard"/>
               <a:ea typeface="Pretendard"/>
@@ -49538,7 +49309,6 @@
           <a:bodyPr/>
           <a:lstStyle/>
           <a:p>
-            <a:pPr/>
             <a:endParaRPr lang="ko-KR" altLang="en-US">
               <a:latin typeface="Pretendard"/>
               <a:ea typeface="Pretendard"/>
@@ -49661,7 +49431,6 @@
           <a:bodyPr/>
           <a:lstStyle/>
           <a:p>
-            <a:pPr/>
             <a:endParaRPr lang="ko-KR" altLang="en-US">
               <a:latin typeface="Pretendard"/>
               <a:ea typeface="Pretendard"/>
@@ -49698,7 +49467,6 @@
           <a:bodyPr/>
           <a:lstStyle/>
           <a:p>
-            <a:pPr/>
             <a:endParaRPr lang="ko-KR" altLang="en-US">
               <a:latin typeface="Pretendard"/>
               <a:ea typeface="Pretendard"/>
@@ -49872,7 +49640,6 @@
           <a:bodyPr/>
           <a:lstStyle/>
           <a:p>
-            <a:pPr/>
             <a:endParaRPr lang="ko-KR" altLang="en-US">
               <a:latin typeface="Pretendard"/>
               <a:ea typeface="Pretendard"/>
@@ -49909,7 +49676,6 @@
           <a:bodyPr/>
           <a:lstStyle/>
           <a:p>
-            <a:pPr/>
             <a:endParaRPr lang="ko-KR" altLang="en-US">
               <a:latin typeface="Pretendard"/>
               <a:ea typeface="Pretendard"/>
@@ -50158,7 +49924,7 @@
           <a:noFill/>
         </p:spPr>
         <p:txBody>
-          <a:bodyPr wrap="none" lIns="0" rIns="0" tIns="0" bIns="0">
+          <a:bodyPr wrap="none" lIns="0" tIns="0" rIns="0" bIns="0">
             <a:spAutoFit/>
           </a:bodyPr>
           <a:lstStyle/>
@@ -50239,7 +50005,6 @@
           <a:bodyPr/>
           <a:lstStyle/>
           <a:p>
-            <a:pPr/>
             <a:endParaRPr lang="ko-KR" altLang="en-US">
               <a:latin typeface="Pretendard"/>
               <a:ea typeface="Pretendard"/>
@@ -50405,7 +50170,6 @@
           <a:bodyPr/>
           <a:lstStyle/>
           <a:p>
-            <a:pPr/>
             <a:endParaRPr lang="ko-KR" altLang="en-US">
               <a:latin typeface="Pretendard"/>
               <a:ea typeface="Pretendard"/>
@@ -50694,7 +50458,6 @@
           <a:bodyPr/>
           <a:lstStyle/>
           <a:p>
-            <a:pPr/>
             <a:endParaRPr lang="ko-KR" altLang="en-US">
               <a:latin typeface="Pretendard"/>
               <a:ea typeface="Pretendard"/>
@@ -50914,7 +50677,7 @@
           <a:noFill/>
         </p:spPr>
         <p:txBody>
-          <a:bodyPr wrap="none" lIns="0" rIns="0" tIns="0" bIns="0">
+          <a:bodyPr wrap="none" lIns="0" tIns="0" rIns="0" bIns="0">
             <a:spAutoFit/>
           </a:bodyPr>
           <a:lstStyle/>
@@ -51297,6 +51060,7 @@
           <a:lstStyle/>
           <a:p>
             <a:pPr algn="ctr"/>
+            <a:endParaRPr/>
           </a:p>
         </p:txBody>
       </p:sp>
@@ -51317,7 +51081,7 @@
           <a:noFill/>
         </p:spPr>
         <p:txBody>
-          <a:bodyPr wrap="square" lIns="0" rIns="0" tIns="0" bIns="0" anchor="ctr">
+          <a:bodyPr wrap="square" lIns="0" tIns="0" rIns="0" bIns="0" anchor="ctr">
             <a:spAutoFit/>
           </a:bodyPr>
           <a:lstStyle/>
@@ -51380,6 +51144,7 @@
           <a:lstStyle/>
           <a:p>
             <a:pPr algn="ctr"/>
+            <a:endParaRPr/>
           </a:p>
         </p:txBody>
       </p:sp>
@@ -51400,7 +51165,7 @@
           <a:noFill/>
         </p:spPr>
         <p:txBody>
-          <a:bodyPr wrap="square" lIns="0" rIns="0" tIns="0" bIns="0" anchor="ctr">
+          <a:bodyPr wrap="square" lIns="0" tIns="0" rIns="0" bIns="0" anchor="ctr">
             <a:spAutoFit/>
           </a:bodyPr>
           <a:lstStyle/>
@@ -51463,6 +51228,7 @@
           <a:lstStyle/>
           <a:p>
             <a:pPr algn="ctr"/>
+            <a:endParaRPr/>
           </a:p>
         </p:txBody>
       </p:sp>
@@ -51483,7 +51249,7 @@
           <a:noFill/>
         </p:spPr>
         <p:txBody>
-          <a:bodyPr wrap="square" lIns="0" rIns="0" tIns="0" bIns="0" anchor="ctr">
+          <a:bodyPr wrap="square" lIns="0" tIns="0" rIns="0" bIns="0" anchor="ctr">
             <a:spAutoFit/>
           </a:bodyPr>
           <a:lstStyle/>
@@ -51546,6 +51312,7 @@
           <a:lstStyle/>
           <a:p>
             <a:pPr algn="ctr"/>
+            <a:endParaRPr/>
           </a:p>
         </p:txBody>
       </p:sp>
@@ -51566,7 +51333,7 @@
           <a:noFill/>
         </p:spPr>
         <p:txBody>
-          <a:bodyPr wrap="square" lIns="0" rIns="0" tIns="0" bIns="0" anchor="ctr">
+          <a:bodyPr wrap="square" lIns="0" tIns="0" rIns="0" bIns="0" anchor="ctr">
             <a:spAutoFit/>
           </a:bodyPr>
           <a:lstStyle/>
@@ -51629,6 +51396,7 @@
           <a:lstStyle/>
           <a:p>
             <a:pPr algn="ctr"/>
+            <a:endParaRPr/>
           </a:p>
         </p:txBody>
       </p:sp>
@@ -51649,7 +51417,7 @@
           <a:noFill/>
         </p:spPr>
         <p:txBody>
-          <a:bodyPr wrap="square" lIns="0" rIns="0" tIns="0" bIns="0" anchor="ctr">
+          <a:bodyPr wrap="square" lIns="0" tIns="0" rIns="0" bIns="0" anchor="ctr">
             <a:spAutoFit/>
           </a:bodyPr>
           <a:lstStyle/>
@@ -51686,7 +51454,7 @@
           <a:noFill/>
         </p:spPr>
         <p:txBody>
-          <a:bodyPr wrap="square" lIns="0" rIns="0" tIns="0" bIns="0" anchor="ctr">
+          <a:bodyPr wrap="square" lIns="0" tIns="0" rIns="0" bIns="0" anchor="ctr">
             <a:spAutoFit/>
           </a:bodyPr>
           <a:lstStyle/>
@@ -51747,6 +51515,7 @@
           <a:lstStyle/>
           <a:p>
             <a:pPr algn="ctr"/>
+            <a:endParaRPr/>
           </a:p>
         </p:txBody>
       </p:sp>
@@ -51791,6 +51560,7 @@
           <a:lstStyle/>
           <a:p>
             <a:pPr algn="ctr"/>
+            <a:endParaRPr/>
           </a:p>
         </p:txBody>
       </p:sp>
@@ -51835,6 +51605,7 @@
           <a:lstStyle/>
           <a:p>
             <a:pPr algn="ctr"/>
+            <a:endParaRPr/>
           </a:p>
         </p:txBody>
       </p:sp>
@@ -51879,6 +51650,7 @@
           <a:lstStyle/>
           <a:p>
             <a:pPr algn="ctr"/>
+            <a:endParaRPr/>
           </a:p>
         </p:txBody>
       </p:sp>
@@ -51923,6 +51695,7 @@
           <a:lstStyle/>
           <a:p>
             <a:pPr algn="ctr"/>
+            <a:endParaRPr/>
           </a:p>
         </p:txBody>
       </p:sp>
@@ -51967,6 +51740,7 @@
           <a:lstStyle/>
           <a:p>
             <a:pPr algn="ctr"/>
+            <a:endParaRPr/>
           </a:p>
         </p:txBody>
       </p:sp>
@@ -51987,7 +51761,7 @@
           <a:noFill/>
         </p:spPr>
         <p:txBody>
-          <a:bodyPr wrap="square" lIns="0" rIns="0" tIns="0" bIns="0" anchor="ctr">
+          <a:bodyPr wrap="square" lIns="0" tIns="0" rIns="0" bIns="0" anchor="ctr">
             <a:spAutoFit/>
           </a:bodyPr>
           <a:lstStyle/>
@@ -52068,7 +51842,6 @@
           <a:bodyPr/>
           <a:lstStyle/>
           <a:p>
-            <a:pPr/>
             <a:endParaRPr lang="ko-KR" altLang="en-US">
               <a:latin typeface="Pretendard"/>
               <a:ea typeface="Pretendard"/>
@@ -52234,7 +52007,6 @@
           <a:bodyPr/>
           <a:lstStyle/>
           <a:p>
-            <a:pPr/>
             <a:endParaRPr lang="ko-KR" altLang="en-US">
               <a:latin typeface="Pretendard"/>
               <a:ea typeface="Pretendard"/>
@@ -52271,7 +52043,6 @@
           <a:bodyPr/>
           <a:lstStyle/>
           <a:p>
-            <a:pPr/>
             <a:endParaRPr lang="ko-KR" altLang="en-US">
               <a:latin typeface="Pretendard"/>
               <a:ea typeface="Pretendard"/>
@@ -52566,7 +52337,6 @@
           <a:bodyPr/>
           <a:lstStyle/>
           <a:p>
-            <a:pPr/>
             <a:endParaRPr lang="ko-KR" altLang="en-US">
               <a:latin typeface="Pretendard"/>
               <a:ea typeface="Pretendard"/>
@@ -52603,7 +52373,6 @@
           <a:bodyPr/>
           <a:lstStyle/>
           <a:p>
-            <a:pPr/>
             <a:endParaRPr lang="ko-KR" altLang="en-US">
               <a:latin typeface="Pretendard"/>
               <a:ea typeface="Pretendard"/>
@@ -52898,7 +52667,6 @@
           <a:bodyPr/>
           <a:lstStyle/>
           <a:p>
-            <a:pPr/>
             <a:endParaRPr lang="ko-KR" altLang="en-US">
               <a:latin typeface="Pretendard"/>
               <a:ea typeface="Pretendard"/>
@@ -52935,7 +52703,6 @@
           <a:bodyPr/>
           <a:lstStyle/>
           <a:p>
-            <a:pPr/>
             <a:endParaRPr lang="ko-KR" altLang="en-US">
               <a:latin typeface="Pretendard"/>
               <a:ea typeface="Pretendard"/>
@@ -53230,7 +52997,6 @@
           <a:bodyPr/>
           <a:lstStyle/>
           <a:p>
-            <a:pPr/>
             <a:endParaRPr lang="ko-KR" altLang="en-US">
               <a:latin typeface="Pretendard"/>
               <a:ea typeface="Pretendard"/>
@@ -53267,7 +53033,6 @@
           <a:bodyPr/>
           <a:lstStyle/>
           <a:p>
-            <a:pPr/>
             <a:endParaRPr lang="ko-KR" altLang="en-US">
               <a:latin typeface="Pretendard"/>
               <a:ea typeface="Pretendard"/>
@@ -53702,7 +53467,7 @@
           <a:noFill/>
         </p:spPr>
         <p:txBody>
-          <a:bodyPr wrap="none" lIns="0" rIns="0" tIns="0" bIns="0">
+          <a:bodyPr wrap="none" lIns="0" tIns="0" rIns="0" bIns="0">
             <a:spAutoFit/>
           </a:bodyPr>
           <a:lstStyle/>
